--- a/exports/pptx/lessons/middle-module-05-dot-addition/day-07-mental-patterns.pptx
+++ b/exports/pptx/lessons/middle-module-05-dot-addition/day-07-mental-patterns.pptx
@@ -17,9 +17,14 @@
     <p:sldId id="265" r:id="rId11"/>
     <p:sldId id="266" r:id="rId12"/>
     <p:sldId id="267" r:id="rId13"/>
+    <p:sldId id="268" r:id="rId14"/>
+    <p:sldId id="269" r:id="rId15"/>
+    <p:sldId id="270" r:id="rId16"/>
+    <p:sldId id="271" r:id="rId17"/>
+    <p:sldId id="272" r:id="rId18"/>
   </p:sldIdLst>
   <p:notesMasterIdLst>
-    <p:notesMasterId r:id="rId14"/>
+    <p:notesMasterId r:id="rId19"/>
   </p:notesMasterIdLst>
   <p:sldSz cx="9144000" cy="5143500"/>
   <p:notesSz cx="5143500" cy="9144000"/>
@@ -801,6 +806,446 @@
             <a:fld id="{F7021451-1387-4CA6-816F-3879F97B5CBC}" type="slidenum">
               <a:rPr lang="en-US"/>
               <a:t>12</a:t>
+            </a:fld>
+            <a:endParaRPr lang="en-US"/>
+          </a:p>
+        </p:txBody>
+      </p:sp>
+    </p:spTree>
+    <p:extLst>
+      <p:ext uri="{BB962C8B-B14F-4D97-AF65-F5344CB8AC3E}">
+        <p14:creationId xmlns:p14="http://schemas.microsoft.com/office/powerpoint/2010/main" val="1024086991"/>
+      </p:ext>
+    </p:extLst>
+  </p:cSld>
+  <p:clrMapOvr>
+    <a:masterClrMapping/>
+  </p:clrMapOvr>
+</p:notes>
+</file>
+
+<file path=ppt/notesSlides/notesSlide13.xml><?xml version="1.0" encoding="utf-8"?>
+<p:notes xmlns:a="http://schemas.openxmlformats.org/drawingml/2006/main" xmlns:r="http://schemas.openxmlformats.org/officeDocument/2006/relationships" xmlns:p="http://schemas.openxmlformats.org/presentationml/2006/main">
+  <p:cSld>
+    <p:spTree>
+      <p:nvGrpSpPr>
+        <p:cNvPr id="1" name=""/>
+        <p:cNvGrpSpPr/>
+        <p:nvPr/>
+      </p:nvGrpSpPr>
+      <p:grpSpPr>
+        <a:xfrm>
+          <a:off x="0" y="0"/>
+          <a:ext cx="0" cy="0"/>
+          <a:chOff x="0" y="0"/>
+          <a:chExt cx="0" cy="0"/>
+        </a:xfrm>
+      </p:grpSpPr>
+      <p:sp>
+        <p:nvSpPr>
+          <p:cNvPr id="2" name="Slide Image Placeholder 1"/>
+          <p:cNvSpPr>
+            <a:spLocks noGrp="1" noRot="1" noChangeAspect="1"/>
+          </p:cNvSpPr>
+          <p:nvPr>
+            <p:ph type="sldImg"/>
+          </p:nvPr>
+        </p:nvSpPr>
+        <p:spPr/>
+      </p:sp>
+      <p:sp>
+        <p:nvSpPr>
+          <p:cNvPr id="3" name="Notes Placeholder 2"/>
+          <p:cNvSpPr>
+            <a:spLocks noGrp="1"/>
+          </p:cNvSpPr>
+          <p:nvPr>
+            <p:ph type="body" idx="1"/>
+          </p:nvPr>
+        </p:nvSpPr>
+        <p:spPr/>
+        <p:txBody>
+          <a:bodyPr/>
+          <a:lstStyle/>
+          <a:p>
+            <a:r>
+              <a:rPr lang="en-US" dirty="0"/>
+              <a:t/>
+            </a:r>
+            <a:endParaRPr lang="en-US" dirty="0"/>
+          </a:p>
+        </p:txBody>
+      </p:sp>
+      <p:sp>
+        <p:nvSpPr>
+          <p:cNvPr id="4" name="Slide Number Placeholder 3"/>
+          <p:cNvSpPr>
+            <a:spLocks noGrp="1"/>
+          </p:cNvSpPr>
+          <p:nvPr>
+            <p:ph type="sldNum" sz="quarter" idx="10"/>
+          </p:nvPr>
+        </p:nvSpPr>
+        <p:spPr/>
+        <p:txBody>
+          <a:bodyPr/>
+          <a:lstStyle/>
+          <a:p>
+            <a:fld id="{F7021451-1387-4CA6-816F-3879F97B5CBC}" type="slidenum">
+              <a:rPr lang="en-US"/>
+              <a:t>13</a:t>
+            </a:fld>
+            <a:endParaRPr lang="en-US"/>
+          </a:p>
+        </p:txBody>
+      </p:sp>
+    </p:spTree>
+    <p:extLst>
+      <p:ext uri="{BB962C8B-B14F-4D97-AF65-F5344CB8AC3E}">
+        <p14:creationId xmlns:p14="http://schemas.microsoft.com/office/powerpoint/2010/main" val="1024086991"/>
+      </p:ext>
+    </p:extLst>
+  </p:cSld>
+  <p:clrMapOvr>
+    <a:masterClrMapping/>
+  </p:clrMapOvr>
+</p:notes>
+</file>
+
+<file path=ppt/notesSlides/notesSlide14.xml><?xml version="1.0" encoding="utf-8"?>
+<p:notes xmlns:a="http://schemas.openxmlformats.org/drawingml/2006/main" xmlns:r="http://schemas.openxmlformats.org/officeDocument/2006/relationships" xmlns:p="http://schemas.openxmlformats.org/presentationml/2006/main">
+  <p:cSld>
+    <p:spTree>
+      <p:nvGrpSpPr>
+        <p:cNvPr id="1" name=""/>
+        <p:cNvGrpSpPr/>
+        <p:nvPr/>
+      </p:nvGrpSpPr>
+      <p:grpSpPr>
+        <a:xfrm>
+          <a:off x="0" y="0"/>
+          <a:ext cx="0" cy="0"/>
+          <a:chOff x="0" y="0"/>
+          <a:chExt cx="0" cy="0"/>
+        </a:xfrm>
+      </p:grpSpPr>
+      <p:sp>
+        <p:nvSpPr>
+          <p:cNvPr id="2" name="Slide Image Placeholder 1"/>
+          <p:cNvSpPr>
+            <a:spLocks noGrp="1" noRot="1" noChangeAspect="1"/>
+          </p:cNvSpPr>
+          <p:nvPr>
+            <p:ph type="sldImg"/>
+          </p:nvPr>
+        </p:nvSpPr>
+        <p:spPr/>
+      </p:sp>
+      <p:sp>
+        <p:nvSpPr>
+          <p:cNvPr id="3" name="Notes Placeholder 2"/>
+          <p:cNvSpPr>
+            <a:spLocks noGrp="1"/>
+          </p:cNvSpPr>
+          <p:nvPr>
+            <p:ph type="body" idx="1"/>
+          </p:nvPr>
+        </p:nvSpPr>
+        <p:spPr/>
+        <p:txBody>
+          <a:bodyPr/>
+          <a:lstStyle/>
+          <a:p>
+            <a:r>
+              <a:rPr lang="en-US" dirty="0"/>
+              <a:t/>
+            </a:r>
+            <a:endParaRPr lang="en-US" dirty="0"/>
+          </a:p>
+        </p:txBody>
+      </p:sp>
+      <p:sp>
+        <p:nvSpPr>
+          <p:cNvPr id="4" name="Slide Number Placeholder 3"/>
+          <p:cNvSpPr>
+            <a:spLocks noGrp="1"/>
+          </p:cNvSpPr>
+          <p:nvPr>
+            <p:ph type="sldNum" sz="quarter" idx="10"/>
+          </p:nvPr>
+        </p:nvSpPr>
+        <p:spPr/>
+        <p:txBody>
+          <a:bodyPr/>
+          <a:lstStyle/>
+          <a:p>
+            <a:fld id="{F7021451-1387-4CA6-816F-3879F97B5CBC}" type="slidenum">
+              <a:rPr lang="en-US"/>
+              <a:t>14</a:t>
+            </a:fld>
+            <a:endParaRPr lang="en-US"/>
+          </a:p>
+        </p:txBody>
+      </p:sp>
+    </p:spTree>
+    <p:extLst>
+      <p:ext uri="{BB962C8B-B14F-4D97-AF65-F5344CB8AC3E}">
+        <p14:creationId xmlns:p14="http://schemas.microsoft.com/office/powerpoint/2010/main" val="1024086991"/>
+      </p:ext>
+    </p:extLst>
+  </p:cSld>
+  <p:clrMapOvr>
+    <a:masterClrMapping/>
+  </p:clrMapOvr>
+</p:notes>
+</file>
+
+<file path=ppt/notesSlides/notesSlide15.xml><?xml version="1.0" encoding="utf-8"?>
+<p:notes xmlns:a="http://schemas.openxmlformats.org/drawingml/2006/main" xmlns:r="http://schemas.openxmlformats.org/officeDocument/2006/relationships" xmlns:p="http://schemas.openxmlformats.org/presentationml/2006/main">
+  <p:cSld>
+    <p:spTree>
+      <p:nvGrpSpPr>
+        <p:cNvPr id="1" name=""/>
+        <p:cNvGrpSpPr/>
+        <p:nvPr/>
+      </p:nvGrpSpPr>
+      <p:grpSpPr>
+        <a:xfrm>
+          <a:off x="0" y="0"/>
+          <a:ext cx="0" cy="0"/>
+          <a:chOff x="0" y="0"/>
+          <a:chExt cx="0" cy="0"/>
+        </a:xfrm>
+      </p:grpSpPr>
+      <p:sp>
+        <p:nvSpPr>
+          <p:cNvPr id="2" name="Slide Image Placeholder 1"/>
+          <p:cNvSpPr>
+            <a:spLocks noGrp="1" noRot="1" noChangeAspect="1"/>
+          </p:cNvSpPr>
+          <p:nvPr>
+            <p:ph type="sldImg"/>
+          </p:nvPr>
+        </p:nvSpPr>
+        <p:spPr/>
+      </p:sp>
+      <p:sp>
+        <p:nvSpPr>
+          <p:cNvPr id="3" name="Notes Placeholder 2"/>
+          <p:cNvSpPr>
+            <a:spLocks noGrp="1"/>
+          </p:cNvSpPr>
+          <p:nvPr>
+            <p:ph type="body" idx="1"/>
+          </p:nvPr>
+        </p:nvSpPr>
+        <p:spPr/>
+        <p:txBody>
+          <a:bodyPr/>
+          <a:lstStyle/>
+          <a:p>
+            <a:r>
+              <a:rPr lang="en-US" dirty="0"/>
+              <a:t/>
+            </a:r>
+            <a:endParaRPr lang="en-US" dirty="0"/>
+          </a:p>
+        </p:txBody>
+      </p:sp>
+      <p:sp>
+        <p:nvSpPr>
+          <p:cNvPr id="4" name="Slide Number Placeholder 3"/>
+          <p:cNvSpPr>
+            <a:spLocks noGrp="1"/>
+          </p:cNvSpPr>
+          <p:nvPr>
+            <p:ph type="sldNum" sz="quarter" idx="10"/>
+          </p:nvPr>
+        </p:nvSpPr>
+        <p:spPr/>
+        <p:txBody>
+          <a:bodyPr/>
+          <a:lstStyle/>
+          <a:p>
+            <a:fld id="{F7021451-1387-4CA6-816F-3879F97B5CBC}" type="slidenum">
+              <a:rPr lang="en-US"/>
+              <a:t>15</a:t>
+            </a:fld>
+            <a:endParaRPr lang="en-US"/>
+          </a:p>
+        </p:txBody>
+      </p:sp>
+    </p:spTree>
+    <p:extLst>
+      <p:ext uri="{BB962C8B-B14F-4D97-AF65-F5344CB8AC3E}">
+        <p14:creationId xmlns:p14="http://schemas.microsoft.com/office/powerpoint/2010/main" val="1024086991"/>
+      </p:ext>
+    </p:extLst>
+  </p:cSld>
+  <p:clrMapOvr>
+    <a:masterClrMapping/>
+  </p:clrMapOvr>
+</p:notes>
+</file>
+
+<file path=ppt/notesSlides/notesSlide16.xml><?xml version="1.0" encoding="utf-8"?>
+<p:notes xmlns:a="http://schemas.openxmlformats.org/drawingml/2006/main" xmlns:r="http://schemas.openxmlformats.org/officeDocument/2006/relationships" xmlns:p="http://schemas.openxmlformats.org/presentationml/2006/main">
+  <p:cSld>
+    <p:spTree>
+      <p:nvGrpSpPr>
+        <p:cNvPr id="1" name=""/>
+        <p:cNvGrpSpPr/>
+        <p:nvPr/>
+      </p:nvGrpSpPr>
+      <p:grpSpPr>
+        <a:xfrm>
+          <a:off x="0" y="0"/>
+          <a:ext cx="0" cy="0"/>
+          <a:chOff x="0" y="0"/>
+          <a:chExt cx="0" cy="0"/>
+        </a:xfrm>
+      </p:grpSpPr>
+      <p:sp>
+        <p:nvSpPr>
+          <p:cNvPr id="2" name="Slide Image Placeholder 1"/>
+          <p:cNvSpPr>
+            <a:spLocks noGrp="1" noRot="1" noChangeAspect="1"/>
+          </p:cNvSpPr>
+          <p:nvPr>
+            <p:ph type="sldImg"/>
+          </p:nvPr>
+        </p:nvSpPr>
+        <p:spPr/>
+      </p:sp>
+      <p:sp>
+        <p:nvSpPr>
+          <p:cNvPr id="3" name="Notes Placeholder 2"/>
+          <p:cNvSpPr>
+            <a:spLocks noGrp="1"/>
+          </p:cNvSpPr>
+          <p:nvPr>
+            <p:ph type="body" idx="1"/>
+          </p:nvPr>
+        </p:nvSpPr>
+        <p:spPr/>
+        <p:txBody>
+          <a:bodyPr/>
+          <a:lstStyle/>
+          <a:p>
+            <a:r>
+              <a:rPr lang="en-US" dirty="0"/>
+              <a:t/>
+            </a:r>
+            <a:endParaRPr lang="en-US" dirty="0"/>
+          </a:p>
+        </p:txBody>
+      </p:sp>
+      <p:sp>
+        <p:nvSpPr>
+          <p:cNvPr id="4" name="Slide Number Placeholder 3"/>
+          <p:cNvSpPr>
+            <a:spLocks noGrp="1"/>
+          </p:cNvSpPr>
+          <p:nvPr>
+            <p:ph type="sldNum" sz="quarter" idx="10"/>
+          </p:nvPr>
+        </p:nvSpPr>
+        <p:spPr/>
+        <p:txBody>
+          <a:bodyPr/>
+          <a:lstStyle/>
+          <a:p>
+            <a:fld id="{F7021451-1387-4CA6-816F-3879F97B5CBC}" type="slidenum">
+              <a:rPr lang="en-US"/>
+              <a:t>16</a:t>
+            </a:fld>
+            <a:endParaRPr lang="en-US"/>
+          </a:p>
+        </p:txBody>
+      </p:sp>
+    </p:spTree>
+    <p:extLst>
+      <p:ext uri="{BB962C8B-B14F-4D97-AF65-F5344CB8AC3E}">
+        <p14:creationId xmlns:p14="http://schemas.microsoft.com/office/powerpoint/2010/main" val="1024086991"/>
+      </p:ext>
+    </p:extLst>
+  </p:cSld>
+  <p:clrMapOvr>
+    <a:masterClrMapping/>
+  </p:clrMapOvr>
+</p:notes>
+</file>
+
+<file path=ppt/notesSlides/notesSlide17.xml><?xml version="1.0" encoding="utf-8"?>
+<p:notes xmlns:a="http://schemas.openxmlformats.org/drawingml/2006/main" xmlns:r="http://schemas.openxmlformats.org/officeDocument/2006/relationships" xmlns:p="http://schemas.openxmlformats.org/presentationml/2006/main">
+  <p:cSld>
+    <p:spTree>
+      <p:nvGrpSpPr>
+        <p:cNvPr id="1" name=""/>
+        <p:cNvGrpSpPr/>
+        <p:nvPr/>
+      </p:nvGrpSpPr>
+      <p:grpSpPr>
+        <a:xfrm>
+          <a:off x="0" y="0"/>
+          <a:ext cx="0" cy="0"/>
+          <a:chOff x="0" y="0"/>
+          <a:chExt cx="0" cy="0"/>
+        </a:xfrm>
+      </p:grpSpPr>
+      <p:sp>
+        <p:nvSpPr>
+          <p:cNvPr id="2" name="Slide Image Placeholder 1"/>
+          <p:cNvSpPr>
+            <a:spLocks noGrp="1" noRot="1" noChangeAspect="1"/>
+          </p:cNvSpPr>
+          <p:nvPr>
+            <p:ph type="sldImg"/>
+          </p:nvPr>
+        </p:nvSpPr>
+        <p:spPr/>
+      </p:sp>
+      <p:sp>
+        <p:nvSpPr>
+          <p:cNvPr id="3" name="Notes Placeholder 2"/>
+          <p:cNvSpPr>
+            <a:spLocks noGrp="1"/>
+          </p:cNvSpPr>
+          <p:nvPr>
+            <p:ph type="body" idx="1"/>
+          </p:nvPr>
+        </p:nvSpPr>
+        <p:spPr/>
+        <p:txBody>
+          <a:bodyPr/>
+          <a:lstStyle/>
+          <a:p>
+            <a:r>
+              <a:rPr lang="en-US" dirty="0"/>
+              <a:t/>
+            </a:r>
+            <a:endParaRPr lang="en-US" dirty="0"/>
+          </a:p>
+        </p:txBody>
+      </p:sp>
+      <p:sp>
+        <p:nvSpPr>
+          <p:cNvPr id="4" name="Slide Number Placeholder 3"/>
+          <p:cNvSpPr>
+            <a:spLocks noGrp="1"/>
+          </p:cNvSpPr>
+          <p:nvPr>
+            <p:ph type="sldNum" sz="quarter" idx="10"/>
+          </p:nvPr>
+        </p:nvSpPr>
+        <p:spPr/>
+        <p:txBody>
+          <a:bodyPr/>
+          <a:lstStyle/>
+          <a:p>
+            <a:fld id="{F7021451-1387-4CA6-816F-3879F97B5CBC}" type="slidenum">
+              <a:rPr lang="en-US"/>
+              <a:t>17</a:t>
             </a:fld>
             <a:endParaRPr lang="en-US"/>
           </a:p>
@@ -2100,102 +2545,6 @@
         </p:nvSpPr>
         <p:spPr>
           <a:xfrm>
-            <a:off x="406301" y="1223963"/>
-            <a:ext cx="8498026" cy="274290"/>
-          </a:xfrm>
-          <a:prstGeom prst="rect">
-            <a:avLst/>
-          </a:prstGeom>
-          <a:noFill/>
-          <a:ln/>
-        </p:spPr>
-        <p:txBody>
-          <a:bodyPr wrap="square" lIns="0" tIns="0" rIns="0" bIns="0" rtlCol="0" anchor="t"/>
-          <a:lstStyle/>
-          <a:p>
-            <a:pPr algn="l" indent="0" marL="0">
-              <a:lnSpc>
-                <a:spcPts val="2160"/>
-              </a:lnSpc>
-              <a:spcBef>
-                <a:spcPts val="600"/>
-              </a:spcBef>
-              <a:spcAft>
-                <a:spcPts val="800"/>
-              </a:spcAft>
-              <a:buNone/>
-            </a:pPr>
-            <a:r>
-              <a:rPr lang="en-US" sz="1800" b="1" dirty="0">
-                <a:solidFill>
-                  <a:srgbClr val="FE4447"/>
-                </a:solidFill>
-                <a:latin typeface="Georgia" pitchFamily="34" charset="0"/>
-                <a:ea typeface="Georgia" pitchFamily="34" charset="-122"/>
-                <a:cs typeface="Georgia" pitchFamily="34" charset="-120"/>
-              </a:rPr>
-              <a:t>Learning objective</a:t>
-            </a:r>
-            <a:endParaRPr lang="en-US" sz="1800" dirty="0"/>
-          </a:p>
-        </p:txBody>
-      </p:sp>
-      <p:sp>
-        <p:nvSpPr>
-          <p:cNvPr id="6" name="Text 4"/>
-          <p:cNvSpPr/>
-          <p:nvPr/>
-        </p:nvSpPr>
-        <p:spPr>
-          <a:xfrm>
-            <a:off x="406301" y="1637854"/>
-            <a:ext cx="8498026" cy="426541"/>
-          </a:xfrm>
-          <a:prstGeom prst="rect">
-            <a:avLst/>
-          </a:prstGeom>
-          <a:noFill/>
-          <a:ln/>
-        </p:spPr>
-        <p:txBody>
-          <a:bodyPr wrap="square" lIns="0" tIns="0" rIns="0" bIns="0" rtlCol="0" anchor="t"/>
-          <a:lstStyle/>
-          <a:p>
-            <a:pPr algn="l" indent="0" marL="0">
-              <a:lnSpc>
-                <a:spcPts val="1680"/>
-              </a:lnSpc>
-              <a:spcBef>
-                <a:spcPts val="300"/>
-              </a:spcBef>
-              <a:spcAft>
-                <a:spcPts val="300"/>
-              </a:spcAft>
-              <a:buNone/>
-            </a:pPr>
-            <a:r>
-              <a:rPr lang="en-US" sz="1200" dirty="0">
-                <a:solidFill>
-                  <a:srgbClr val="1C2833"/>
-                </a:solidFill>
-                <a:latin typeface="Arial" pitchFamily="34" charset="0"/>
-                <a:ea typeface="Arial" pitchFamily="34" charset="-122"/>
-                <a:cs typeface="Arial" pitchFamily="34" charset="-120"/>
-              </a:rPr>
-              <a:t>By the end of this lesson, students will add 2-digit numbers ending in 9, 19, 29, ... (or 8, 18, 28, ...) mentally, by adding the round base and subtracting the deficiency.</a:t>
-            </a:r>
-            <a:endParaRPr lang="en-US" sz="1200" dirty="0"/>
-          </a:p>
-        </p:txBody>
-      </p:sp>
-      <p:sp>
-        <p:nvSpPr>
-          <p:cNvPr id="7" name="Text 5"/>
-          <p:cNvSpPr/>
-          <p:nvPr/>
-        </p:nvSpPr>
-        <p:spPr>
-          <a:xfrm>
             <a:off x="406301" y="4434929"/>
             <a:ext cx="8498026" cy="213271"/>
           </a:xfrm>
@@ -2340,7 +2689,7 @@
                 <a:ea typeface="Georgia" pitchFamily="34" charset="-122"/>
                 <a:cs typeface="Georgia" pitchFamily="34" charset="-120"/>
               </a:rPr>
-              <a:t>Differentiation</a:t>
+              <a:t>Core (15 min) — The "near-base" pattern (cont.)</a:t>
             </a:r>
             <a:endParaRPr lang="en-US" sz="1800" dirty="0"/>
           </a:p>
@@ -2355,7 +2704,7 @@
         <p:spPr>
           <a:xfrm>
             <a:off x="634901" y="883593"/>
-            <a:ext cx="8102798" cy="731341"/>
+            <a:ext cx="8102798" cy="487561"/>
           </a:xfrm>
           <a:prstGeom prst="rect">
             <a:avLst/>
@@ -2386,7 +2735,7 @@
                 <a:ea typeface="Arial" pitchFamily="34" charset="-122"/>
                 <a:cs typeface="Arial" pitchFamily="34" charset="-120"/>
               </a:rPr>
-              <a:t>Tier up:</a:t>
+              <a:t>Why?</a:t>
             </a:r>
             <a:pPr algn="l" indent="0" marL="0">
               <a:lnSpc>
@@ -2406,23 +2755,19 @@
                 <a:ea typeface="Arial" pitchFamily="34" charset="-122"/>
                 <a:cs typeface="Arial" pitchFamily="34" charset="-120"/>
               </a:rPr>
-              <a:t> Apply the same idea to numbers near 100 (e.g. 234 + 98 = 234 + 100 − 2). Also try 3-digit additions in your head.</a:t>
-            </a:r>
-            <a:endParaRPr lang="en-US" sz="1200" dirty="0"/>
-          </a:p>
-          <a:p>
-            <a:pPr algn="l" marL="342900" indent="-342900">
+              <a:t> Same "completion to a base" idea — and now the base can be 10, 20, 30, 100. This is exactly Tirthaji's sūtra #7 (</a:t>
+            </a:r>
+            <a:pPr algn="l" indent="0" marL="0">
               <a:lnSpc>
                 <a:spcPts val="1620"/>
               </a:lnSpc>
               <a:spcAft>
                 <a:spcPts val="300"/>
               </a:spcAft>
-              <a:buSzPct val="100000"/>
-              <a:buChar char="•"/>
-            </a:pPr>
-            <a:r>
-              <a:rPr lang="en-US" sz="1200" b="1" dirty="0">
+              <a:buNone/>
+            </a:pPr>
+            <a:r>
+              <a:rPr lang="en-US" sz="1200" i="1" dirty="0">
                 <a:solidFill>
                   <a:srgbClr val="1C2833"/>
                 </a:solidFill>
@@ -2430,7 +2775,7 @@
                 <a:ea typeface="Arial" pitchFamily="34" charset="-122"/>
                 <a:cs typeface="Arial" pitchFamily="34" charset="-120"/>
               </a:rPr>
-              <a:t>Tier down:</a:t>
+              <a:t>Sankalana Vyavakalanābhyām</a:t>
             </a:r>
             <a:pPr algn="l" indent="0" marL="0">
               <a:lnSpc>
@@ -2450,7 +2795,7 @@
                 <a:ea typeface="Arial" pitchFamily="34" charset="-122"/>
                 <a:cs typeface="Arial" pitchFamily="34" charset="-120"/>
               </a:rPr>
-              <a:t> Stick to "+9" first. Once that's automatic, add "+19, +29, +39." Build up.</a:t>
+              <a:t> — "by addition and by subtraction"). Write the name on the board.</a:t>
             </a:r>
             <a:endParaRPr lang="en-US" sz="1200" dirty="0"/>
           </a:p>
@@ -2608,7 +2953,7 @@
                 <a:ea typeface="Georgia" pitchFamily="34" charset="-122"/>
                 <a:cs typeface="Georgia" pitchFamily="34" charset="-120"/>
               </a:rPr>
-              <a:t>Teacher notes</a:t>
+              <a:t>Activity (20 min) — Near-base drills</a:t>
             </a:r>
             <a:endParaRPr lang="en-US" sz="1800" dirty="0"/>
           </a:p>
@@ -2623,7 +2968,7 @@
         <p:spPr>
           <a:xfrm>
             <a:off x="406301" y="870942"/>
-            <a:ext cx="8498026" cy="853083"/>
+            <a:ext cx="8498026" cy="222796"/>
           </a:xfrm>
           <a:prstGeom prst="rect">
             <a:avLst/>
@@ -2656,7 +3001,7 @@
                 <a:ea typeface="Arial" pitchFamily="34" charset="-122"/>
                 <a:cs typeface="Arial" pitchFamily="34" charset="-120"/>
               </a:rPr>
-              <a:t>– Some students will object: "But subtracting is HARDER than adding." Not really — subtracting 1 or 2 is trivial once you've done the bigger jump. Push through the initial resistance with the drills. – This lesson is also a preview of Module 9 (Subtraction by Complements). Don't elaborate now; just note that </a:t>
+              <a:t>Follow </a:t>
             </a:r>
             <a:pPr algn="l" indent="0" marL="0">
               <a:lnSpc>
@@ -2671,7 +3016,7 @@
               <a:buNone/>
             </a:pPr>
             <a:r>
-              <a:rPr lang="en-US" sz="1200" i="1" dirty="0">
+              <a:rPr lang="en-US" sz="1200" dirty="0">
                 <a:solidFill>
                   <a:srgbClr val="1C2833"/>
                 </a:solidFill>
@@ -2679,7 +3024,7 @@
                 <a:ea typeface="Arial" pitchFamily="34" charset="-122"/>
                 <a:cs typeface="Arial" pitchFamily="34" charset="-120"/>
               </a:rPr>
-              <a:t>Nikhilam</a:t>
+              <a:t>activities/activity-02-near-base.md</a:t>
             </a:r>
             <a:pPr algn="l" indent="0" marL="0">
               <a:lnSpc>
@@ -2702,7 +3047,7 @@
                 <a:ea typeface="Arial" pitchFamily="34" charset="-122"/>
                 <a:cs typeface="Arial" pitchFamily="34" charset="-120"/>
               </a:rPr>
-              <a:t> (sūtra #2) and other complement techniques are coming.</a:t>
+              <a:t>. Brief:</a:t>
             </a:r>
             <a:endParaRPr lang="en-US" sz="1200" dirty="0"/>
           </a:p>
@@ -2711,6 +3056,124 @@
       <p:sp>
         <p:nvSpPr>
           <p:cNvPr id="5" name="Text 3"/>
+          <p:cNvSpPr/>
+          <p:nvPr/>
+        </p:nvSpPr>
+        <p:spPr>
+          <a:xfrm>
+            <a:off x="634901" y="1182588"/>
+            <a:ext cx="8102798" cy="1218902"/>
+          </a:xfrm>
+          <a:prstGeom prst="rect">
+            <a:avLst/>
+          </a:prstGeom>
+          <a:noFill/>
+          <a:ln/>
+        </p:spPr>
+        <p:txBody>
+          <a:bodyPr wrap="square" lIns="0" tIns="0" rIns="0" bIns="0" rtlCol="0" anchor="t"/>
+          <a:lstStyle/>
+          <a:p>
+            <a:pPr algn="l" marL="342900" indent="-342900">
+              <a:lnSpc>
+                <a:spcPts val="1620"/>
+              </a:lnSpc>
+              <a:spcAft>
+                <a:spcPts val="300"/>
+              </a:spcAft>
+              <a:buSzPct val="100000"/>
+              <a:buChar char="•"/>
+            </a:pPr>
+            <a:r>
+              <a:rPr lang="en-US" sz="1200" dirty="0">
+                <a:solidFill>
+                  <a:srgbClr val="1C2833"/>
+                </a:solidFill>
+                <a:latin typeface="Arial" pitchFamily="34" charset="0"/>
+                <a:ea typeface="Arial" pitchFamily="34" charset="-122"/>
+                <a:cs typeface="Arial" pitchFamily="34" charset="-120"/>
+              </a:rPr>
+              <a:t>5 min individual: 20 problems on a sheet, do as many as you can.</a:t>
+            </a:r>
+            <a:endParaRPr lang="en-US" sz="1200" dirty="0"/>
+          </a:p>
+          <a:p>
+            <a:pPr algn="l" marL="342900" indent="-342900">
+              <a:lnSpc>
+                <a:spcPts val="1620"/>
+              </a:lnSpc>
+              <a:spcAft>
+                <a:spcPts val="300"/>
+              </a:spcAft>
+              <a:buSzPct val="100000"/>
+              <a:buChar char="•"/>
+            </a:pPr>
+            <a:r>
+              <a:rPr lang="en-US" sz="1200" dirty="0">
+                <a:solidFill>
+                  <a:srgbClr val="1C2833"/>
+                </a:solidFill>
+                <a:latin typeface="Arial" pitchFamily="34" charset="0"/>
+                <a:ea typeface="Arial" pitchFamily="34" charset="-122"/>
+                <a:cs typeface="Arial" pitchFamily="34" charset="-120"/>
+              </a:rPr>
+              <a:t>5 min paired: partner-A reads a problem aloud, partner-B answers mentally in &lt;3 seconds, swap.</a:t>
+            </a:r>
+            <a:endParaRPr lang="en-US" sz="1200" dirty="0"/>
+          </a:p>
+          <a:p>
+            <a:pPr algn="l" marL="342900" indent="-342900">
+              <a:lnSpc>
+                <a:spcPts val="1620"/>
+              </a:lnSpc>
+              <a:spcAft>
+                <a:spcPts val="300"/>
+              </a:spcAft>
+              <a:buSzPct val="100000"/>
+              <a:buChar char="•"/>
+            </a:pPr>
+            <a:r>
+              <a:rPr lang="en-US" sz="1200" dirty="0">
+                <a:solidFill>
+                  <a:srgbClr val="1C2833"/>
+                </a:solidFill>
+                <a:latin typeface="Arial" pitchFamily="34" charset="0"/>
+                <a:ea typeface="Arial" pitchFamily="34" charset="-122"/>
+                <a:cs typeface="Arial" pitchFamily="34" charset="-120"/>
+              </a:rPr>
+              <a:t>5 min mixed: 10 problems on the board; class shouts answer in chorus.</a:t>
+            </a:r>
+            <a:endParaRPr lang="en-US" sz="1200" dirty="0"/>
+          </a:p>
+          <a:p>
+            <a:pPr algn="l" marL="342900" indent="-342900">
+              <a:lnSpc>
+                <a:spcPts val="1620"/>
+              </a:lnSpc>
+              <a:spcAft>
+                <a:spcPts val="300"/>
+              </a:spcAft>
+              <a:buSzPct val="100000"/>
+              <a:buChar char="•"/>
+            </a:pPr>
+            <a:r>
+              <a:rPr lang="en-US" sz="1200" dirty="0">
+                <a:solidFill>
+                  <a:srgbClr val="1C2833"/>
+                </a:solidFill>
+                <a:latin typeface="Arial" pitchFamily="34" charset="0"/>
+                <a:ea typeface="Arial" pitchFamily="34" charset="-122"/>
+                <a:cs typeface="Arial" pitchFamily="34" charset="-120"/>
+              </a:rPr>
+              <a:t>5 min quick-fire: teacher calls a 2-digit number ending in 9 or 8, then any other 2-digit number; students whisper-answer to their neighbour.</a:t>
+            </a:r>
+            <a:endParaRPr lang="en-US" sz="1200" dirty="0"/>
+          </a:p>
+        </p:txBody>
+      </p:sp>
+      <p:sp>
+        <p:nvSpPr>
+          <p:cNvPr id="6" name="Text 4"/>
           <p:cNvSpPr/>
           <p:nvPr/>
         </p:nvSpPr>
@@ -2860,6 +3323,1775 @@
                 <a:ea typeface="Georgia" pitchFamily="34" charset="-122"/>
                 <a:cs typeface="Georgia" pitchFamily="34" charset="-120"/>
               </a:rPr>
+              <a:t>Wrap-up (5 min)</a:t>
+            </a:r>
+            <a:endParaRPr lang="en-US" sz="1800" dirty="0"/>
+          </a:p>
+        </p:txBody>
+      </p:sp>
+      <p:sp>
+        <p:nvSpPr>
+          <p:cNvPr id="4" name="Text 2"/>
+          <p:cNvSpPr/>
+          <p:nvPr/>
+        </p:nvSpPr>
+        <p:spPr>
+          <a:xfrm>
+            <a:off x="634901" y="883593"/>
+            <a:ext cx="8102798" cy="544711"/>
+          </a:xfrm>
+          <a:prstGeom prst="rect">
+            <a:avLst/>
+          </a:prstGeom>
+          <a:noFill/>
+          <a:ln/>
+        </p:spPr>
+        <p:txBody>
+          <a:bodyPr wrap="square" lIns="0" tIns="0" rIns="0" bIns="0" rtlCol="0" anchor="t"/>
+          <a:lstStyle/>
+          <a:p>
+            <a:pPr algn="l" marL="342900" indent="-342900">
+              <a:lnSpc>
+                <a:spcPts val="1620"/>
+              </a:lnSpc>
+              <a:spcAft>
+                <a:spcPts val="300"/>
+              </a:spcAft>
+              <a:buSzPct val="100000"/>
+              <a:buChar char="•"/>
+            </a:pPr>
+            <a:r>
+              <a:rPr lang="en-US" sz="1200" dirty="0">
+                <a:solidFill>
+                  <a:srgbClr val="1C2833"/>
+                </a:solidFill>
+                <a:latin typeface="Arial" pitchFamily="34" charset="0"/>
+                <a:ea typeface="Arial" pitchFamily="34" charset="-122"/>
+                <a:cs typeface="Arial" pitchFamily="34" charset="-120"/>
+              </a:rPr>
+              <a:t>Show of hands: who can now add </a:t>
+            </a:r>
+            <a:pPr algn="l" indent="0" marL="0">
+              <a:lnSpc>
+                <a:spcPts val="1620"/>
+              </a:lnSpc>
+              <a:spcAft>
+                <a:spcPts val="300"/>
+              </a:spcAft>
+              <a:buNone/>
+            </a:pPr>
+            <a:r>
+              <a:rPr lang="en-US" sz="1200" dirty="0">
+                <a:solidFill>
+                  <a:srgbClr val="1C2833"/>
+                </a:solidFill>
+                <a:latin typeface="Arial" pitchFamily="34" charset="0"/>
+                <a:ea typeface="Arial" pitchFamily="34" charset="-122"/>
+                <a:cs typeface="Arial" pitchFamily="34" charset="-120"/>
+              </a:rPr>
+              <a:t>+ 9</a:t>
+            </a:r>
+            <a:pPr algn="l" indent="0" marL="0">
+              <a:lnSpc>
+                <a:spcPts val="1620"/>
+              </a:lnSpc>
+              <a:spcAft>
+                <a:spcPts val="300"/>
+              </a:spcAft>
+              <a:buNone/>
+            </a:pPr>
+            <a:r>
+              <a:rPr lang="en-US" sz="1200" dirty="0">
+                <a:solidFill>
+                  <a:srgbClr val="1C2833"/>
+                </a:solidFill>
+                <a:latin typeface="Arial" pitchFamily="34" charset="0"/>
+                <a:ea typeface="Arial" pitchFamily="34" charset="-122"/>
+                <a:cs typeface="Arial" pitchFamily="34" charset="-120"/>
+              </a:rPr>
+              <a:t> to any 2-digit number in under 1 second? (Should be most of the class.)</a:t>
+            </a:r>
+            <a:endParaRPr lang="en-US" sz="1200" dirty="0"/>
+          </a:p>
+          <a:p>
+            <a:pPr algn="l" marL="342900" indent="-342900">
+              <a:lnSpc>
+                <a:spcPts val="1620"/>
+              </a:lnSpc>
+              <a:spcAft>
+                <a:spcPts val="300"/>
+              </a:spcAft>
+              <a:buSzPct val="100000"/>
+              <a:buChar char="•"/>
+            </a:pPr>
+            <a:r>
+              <a:rPr lang="en-US" sz="1200" dirty="0">
+                <a:solidFill>
+                  <a:srgbClr val="1C2833"/>
+                </a:solidFill>
+                <a:latin typeface="Arial" pitchFamily="34" charset="0"/>
+                <a:ea typeface="Arial" pitchFamily="34" charset="-122"/>
+                <a:cs typeface="Arial" pitchFamily="34" charset="-120"/>
+              </a:rPr>
+              <a:t>Preview Day 8: project work begins.</a:t>
+            </a:r>
+            <a:endParaRPr lang="en-US" sz="1200" dirty="0"/>
+          </a:p>
+        </p:txBody>
+      </p:sp>
+      <p:sp>
+        <p:nvSpPr>
+          <p:cNvPr id="5" name="Text 3"/>
+          <p:cNvSpPr/>
+          <p:nvPr/>
+        </p:nvSpPr>
+        <p:spPr>
+          <a:xfrm>
+            <a:off x="406301" y="4434929"/>
+            <a:ext cx="8498026" cy="213271"/>
+          </a:xfrm>
+          <a:prstGeom prst="rect">
+            <a:avLst/>
+          </a:prstGeom>
+          <a:noFill/>
+          <a:ln/>
+        </p:spPr>
+        <p:txBody>
+          <a:bodyPr wrap="square" lIns="0" tIns="0" rIns="0" bIns="0" rtlCol="0" anchor="t"/>
+          <a:lstStyle/>
+          <a:p>
+            <a:pPr algn="l" indent="0" marL="0">
+              <a:lnSpc>
+                <a:spcPts val="1680"/>
+              </a:lnSpc>
+              <a:spcBef>
+                <a:spcPts val="300"/>
+              </a:spcBef>
+              <a:spcAft>
+                <a:spcPts val="300"/>
+              </a:spcAft>
+              <a:buNone/>
+            </a:pPr>
+            <a:r>
+              <a:rPr lang="en-US" sz="1200" dirty="0">
+                <a:solidFill>
+                  <a:srgbClr val="1C2833"/>
+                </a:solidFill>
+                <a:latin typeface="Arial" pitchFamily="34" charset="0"/>
+                <a:ea typeface="Arial" pitchFamily="34" charset="-122"/>
+                <a:cs typeface="Arial" pitchFamily="34" charset="-120"/>
+              </a:rPr>
+              <a:t>Middle ·  · IKS Curriculum</a:t>
+            </a:r>
+            <a:endParaRPr lang="en-US" sz="1200" dirty="0"/>
+          </a:p>
+        </p:txBody>
+      </p:sp>
+    </p:spTree>
+  </p:cSld>
+  <p:clrMapOvr>
+    <a:masterClrMapping/>
+  </p:clrMapOvr>
+</p:sld>
+</file>
+
+<file path=ppt/slides/slide13.xml><?xml version="1.0" encoding="utf-8"?>
+<p:sld xmlns:a="http://schemas.openxmlformats.org/drawingml/2006/main" xmlns:r="http://schemas.openxmlformats.org/officeDocument/2006/relationships" xmlns:p="http://schemas.openxmlformats.org/presentationml/2006/main">
+  <p:cSld name="Slide 13">
+    <p:bg>
+      <p:bgPr>
+        <a:solidFill>
+          <a:srgbClr val="FFFFFF"/>
+        </a:solidFill>
+      </p:bgPr>
+    </p:bg>
+    <p:spTree>
+      <p:nvGrpSpPr>
+        <p:cNvPr id="1" name=""/>
+        <p:cNvGrpSpPr/>
+        <p:nvPr/>
+      </p:nvGrpSpPr>
+      <p:grpSpPr>
+        <a:xfrm>
+          <a:off x="0" y="0"/>
+          <a:ext cx="0" cy="0"/>
+          <a:chOff x="0" y="0"/>
+          <a:chExt cx="0" cy="0"/>
+        </a:xfrm>
+      </p:grpSpPr>
+      <p:sp>
+        <p:nvSpPr>
+          <p:cNvPr id="2" name="Text 0"/>
+          <p:cNvSpPr/>
+          <p:nvPr/>
+        </p:nvSpPr>
+        <p:spPr>
+          <a:xfrm>
+            <a:off x="0" y="0"/>
+            <a:ext cx="9144000" cy="101501"/>
+          </a:xfrm>
+          <a:prstGeom prst="rect">
+            <a:avLst/>
+          </a:prstGeom>
+          <a:solidFill>
+            <a:srgbClr val="277884"/>
+          </a:solidFill>
+          <a:ln/>
+        </p:spPr>
+        <p:txBody>
+          <a:bodyPr wrap="square" rtlCol="0" anchor="ctr"/>
+          <a:lstStyle/>
+          <a:p>
+            <a:pPr indent="0" marL="0">
+              <a:buNone/>
+            </a:pPr>
+            <a:endParaRPr lang="en-US" dirty="0"/>
+          </a:p>
+        </p:txBody>
+      </p:sp>
+      <p:sp>
+        <p:nvSpPr>
+          <p:cNvPr id="3" name="Text 1"/>
+          <p:cNvSpPr/>
+          <p:nvPr/>
+        </p:nvSpPr>
+        <p:spPr>
+          <a:xfrm>
+            <a:off x="406301" y="457051"/>
+            <a:ext cx="8498026" cy="274290"/>
+          </a:xfrm>
+          <a:prstGeom prst="rect">
+            <a:avLst/>
+          </a:prstGeom>
+          <a:noFill/>
+          <a:ln/>
+        </p:spPr>
+        <p:txBody>
+          <a:bodyPr wrap="square" lIns="0" tIns="0" rIns="0" bIns="0" rtlCol="0" anchor="t"/>
+          <a:lstStyle/>
+          <a:p>
+            <a:pPr algn="l" indent="0" marL="0">
+              <a:lnSpc>
+                <a:spcPts val="2160"/>
+              </a:lnSpc>
+              <a:spcBef>
+                <a:spcPts val="600"/>
+              </a:spcBef>
+              <a:spcAft>
+                <a:spcPts val="800"/>
+              </a:spcAft>
+              <a:buNone/>
+            </a:pPr>
+            <a:r>
+              <a:rPr lang="en-US" sz="1800" b="1" dirty="0">
+                <a:solidFill>
+                  <a:srgbClr val="FE4447"/>
+                </a:solidFill>
+                <a:latin typeface="Georgia" pitchFamily="34" charset="0"/>
+                <a:ea typeface="Georgia" pitchFamily="34" charset="-122"/>
+                <a:cs typeface="Georgia" pitchFamily="34" charset="-120"/>
+              </a:rPr>
+              <a:t>Student-facing content</a:t>
+            </a:r>
+            <a:endParaRPr lang="en-US" sz="1800" dirty="0"/>
+          </a:p>
+        </p:txBody>
+      </p:sp>
+      <p:sp>
+        <p:nvSpPr>
+          <p:cNvPr id="4" name="Text 2"/>
+          <p:cNvSpPr/>
+          <p:nvPr/>
+        </p:nvSpPr>
+        <p:spPr>
+          <a:xfrm>
+            <a:off x="406301" y="883593"/>
+            <a:ext cx="8331398" cy="3264694"/>
+          </a:xfrm>
+          <a:prstGeom prst="rect">
+            <a:avLst/>
+          </a:prstGeom>
+          <a:solidFill>
+            <a:srgbClr val="F4F8F9"/>
+          </a:solidFill>
+          <a:ln/>
+        </p:spPr>
+        <p:txBody>
+          <a:bodyPr wrap="square" rtlCol="0" anchor="ctr"/>
+          <a:lstStyle/>
+          <a:p>
+            <a:pPr indent="0" marL="0">
+              <a:buNone/>
+            </a:pPr>
+            <a:endParaRPr lang="en-US" dirty="0"/>
+          </a:p>
+        </p:txBody>
+      </p:sp>
+      <p:sp>
+        <p:nvSpPr>
+          <p:cNvPr id="5" name="Shape 3"/>
+          <p:cNvSpPr/>
+          <p:nvPr/>
+        </p:nvSpPr>
+        <p:spPr>
+          <a:xfrm>
+            <a:off x="434876" y="883593"/>
+            <a:ext cx="0" cy="3264694"/>
+          </a:xfrm>
+          <a:prstGeom prst="line">
+            <a:avLst/>
+          </a:prstGeom>
+          <a:noFill/>
+          <a:ln w="57150">
+            <a:solidFill>
+              <a:srgbClr val="FE4447"/>
+            </a:solidFill>
+            <a:prstDash val="solid"/>
+          </a:ln>
+        </p:spPr>
+      </p:sp>
+      <p:sp>
+        <p:nvSpPr>
+          <p:cNvPr id="6" name="Text 4"/>
+          <p:cNvSpPr/>
+          <p:nvPr/>
+        </p:nvSpPr>
+        <p:spPr>
+          <a:xfrm>
+            <a:off x="692051" y="1074093"/>
+            <a:ext cx="7973389" cy="230981"/>
+          </a:xfrm>
+          <a:prstGeom prst="rect">
+            <a:avLst/>
+          </a:prstGeom>
+          <a:noFill/>
+          <a:ln/>
+        </p:spPr>
+        <p:txBody>
+          <a:bodyPr wrap="square" lIns="0" tIns="0" rIns="0" bIns="0" rtlCol="0" anchor="t"/>
+          <a:lstStyle/>
+          <a:p>
+            <a:pPr algn="l" indent="0" marL="0">
+              <a:lnSpc>
+                <a:spcPts val="1820"/>
+              </a:lnSpc>
+              <a:spcBef>
+                <a:spcPts val="300"/>
+              </a:spcBef>
+              <a:spcAft>
+                <a:spcPts val="300"/>
+              </a:spcAft>
+              <a:buNone/>
+            </a:pPr>
+            <a:r>
+              <a:rPr lang="en-US" sz="1300" b="1" i="1" dirty="0">
+                <a:solidFill>
+                  <a:srgbClr val="1C2833"/>
+                </a:solidFill>
+                <a:latin typeface="Georgia" pitchFamily="34" charset="0"/>
+                <a:ea typeface="Georgia" pitchFamily="34" charset="-122"/>
+                <a:cs typeface="Georgia" pitchFamily="34" charset="-120"/>
+              </a:rPr>
+              <a:t>Add a number near a base (10, 20, 30, 100)</a:t>
+            </a:r>
+            <a:endParaRPr lang="en-US" sz="1300" dirty="0"/>
+          </a:p>
+        </p:txBody>
+      </p:sp>
+      <p:sp>
+        <p:nvSpPr>
+          <p:cNvPr id="7" name="Text 5"/>
+          <p:cNvSpPr/>
+          <p:nvPr/>
+        </p:nvSpPr>
+        <p:spPr>
+          <a:xfrm>
+            <a:off x="692051" y="1343174"/>
+            <a:ext cx="7973389" cy="230981"/>
+          </a:xfrm>
+          <a:prstGeom prst="rect">
+            <a:avLst/>
+          </a:prstGeom>
+          <a:noFill/>
+          <a:ln/>
+        </p:spPr>
+        <p:txBody>
+          <a:bodyPr wrap="square" lIns="0" tIns="0" rIns="0" bIns="0" rtlCol="0" anchor="t"/>
+          <a:lstStyle/>
+          <a:p>
+            <a:pPr algn="l" indent="0" marL="0">
+              <a:lnSpc>
+                <a:spcPts val="1820"/>
+              </a:lnSpc>
+              <a:spcBef>
+                <a:spcPts val="300"/>
+              </a:spcBef>
+              <a:spcAft>
+                <a:spcPts val="300"/>
+              </a:spcAft>
+              <a:buNone/>
+            </a:pPr>
+            <a:r>
+              <a:rPr lang="en-US" sz="1300" i="1" dirty="0">
+                <a:solidFill>
+                  <a:srgbClr val="1C2833"/>
+                </a:solidFill>
+                <a:latin typeface="Georgia" pitchFamily="34" charset="0"/>
+                <a:ea typeface="Georgia" pitchFamily="34" charset="-122"/>
+                <a:cs typeface="Georgia" pitchFamily="34" charset="-120"/>
+              </a:rPr>
+              <a:t>Round it UP to the base.</a:t>
+            </a:r>
+            <a:endParaRPr lang="en-US" sz="1300" dirty="0"/>
+          </a:p>
+        </p:txBody>
+      </p:sp>
+      <p:sp>
+        <p:nvSpPr>
+          <p:cNvPr id="8" name="Text 6"/>
+          <p:cNvSpPr/>
+          <p:nvPr/>
+        </p:nvSpPr>
+        <p:spPr>
+          <a:xfrm>
+            <a:off x="692051" y="1612255"/>
+            <a:ext cx="7973389" cy="230981"/>
+          </a:xfrm>
+          <a:prstGeom prst="rect">
+            <a:avLst/>
+          </a:prstGeom>
+          <a:noFill/>
+          <a:ln/>
+        </p:spPr>
+        <p:txBody>
+          <a:bodyPr wrap="square" lIns="0" tIns="0" rIns="0" bIns="0" rtlCol="0" anchor="t"/>
+          <a:lstStyle/>
+          <a:p>
+            <a:pPr algn="l" indent="0" marL="0">
+              <a:lnSpc>
+                <a:spcPts val="1820"/>
+              </a:lnSpc>
+              <a:spcBef>
+                <a:spcPts val="300"/>
+              </a:spcBef>
+              <a:spcAft>
+                <a:spcPts val="300"/>
+              </a:spcAft>
+              <a:buNone/>
+            </a:pPr>
+            <a:r>
+              <a:rPr lang="en-US" sz="1300" i="1" dirty="0">
+                <a:solidFill>
+                  <a:srgbClr val="1C2833"/>
+                </a:solidFill>
+                <a:latin typeface="Georgia" pitchFamily="34" charset="0"/>
+                <a:ea typeface="Georgia" pitchFamily="34" charset="-122"/>
+                <a:cs typeface="Georgia" pitchFamily="34" charset="-120"/>
+              </a:rPr>
+              <a:t>Add that.</a:t>
+            </a:r>
+            <a:endParaRPr lang="en-US" sz="1300" dirty="0"/>
+          </a:p>
+        </p:txBody>
+      </p:sp>
+      <p:sp>
+        <p:nvSpPr>
+          <p:cNvPr id="9" name="Text 7"/>
+          <p:cNvSpPr/>
+          <p:nvPr/>
+        </p:nvSpPr>
+        <p:spPr>
+          <a:xfrm>
+            <a:off x="692051" y="1881336"/>
+            <a:ext cx="7973389" cy="230981"/>
+          </a:xfrm>
+          <a:prstGeom prst="rect">
+            <a:avLst/>
+          </a:prstGeom>
+          <a:noFill/>
+          <a:ln/>
+        </p:spPr>
+        <p:txBody>
+          <a:bodyPr wrap="square" lIns="0" tIns="0" rIns="0" bIns="0" rtlCol="0" anchor="t"/>
+          <a:lstStyle/>
+          <a:p>
+            <a:pPr algn="l" indent="0" marL="0">
+              <a:lnSpc>
+                <a:spcPts val="1820"/>
+              </a:lnSpc>
+              <a:spcBef>
+                <a:spcPts val="300"/>
+              </a:spcBef>
+              <a:spcAft>
+                <a:spcPts val="300"/>
+              </a:spcAft>
+              <a:buNone/>
+            </a:pPr>
+            <a:r>
+              <a:rPr lang="en-US" sz="1300" i="1" dirty="0">
+                <a:solidFill>
+                  <a:srgbClr val="1C2833"/>
+                </a:solidFill>
+                <a:latin typeface="Georgia" pitchFamily="34" charset="0"/>
+                <a:ea typeface="Georgia" pitchFamily="34" charset="-122"/>
+                <a:cs typeface="Georgia" pitchFamily="34" charset="-120"/>
+              </a:rPr>
+              <a:t>Subtract the deficiency.</a:t>
+            </a:r>
+            <a:endParaRPr lang="en-US" sz="1300" dirty="0"/>
+          </a:p>
+        </p:txBody>
+      </p:sp>
+      <p:sp>
+        <p:nvSpPr>
+          <p:cNvPr id="10" name="Text 8"/>
+          <p:cNvSpPr/>
+          <p:nvPr/>
+        </p:nvSpPr>
+        <p:spPr>
+          <a:xfrm>
+            <a:off x="692051" y="2150418"/>
+            <a:ext cx="7973389" cy="230981"/>
+          </a:xfrm>
+          <a:prstGeom prst="rect">
+            <a:avLst/>
+          </a:prstGeom>
+          <a:noFill/>
+          <a:ln/>
+        </p:spPr>
+        <p:txBody>
+          <a:bodyPr wrap="square" lIns="0" tIns="0" rIns="0" bIns="0" rtlCol="0" anchor="t"/>
+          <a:lstStyle/>
+          <a:p>
+            <a:pPr algn="l" indent="0" marL="0">
+              <a:lnSpc>
+                <a:spcPts val="1820"/>
+              </a:lnSpc>
+              <a:spcBef>
+                <a:spcPts val="300"/>
+              </a:spcBef>
+              <a:spcAft>
+                <a:spcPts val="300"/>
+              </a:spcAft>
+              <a:buNone/>
+            </a:pPr>
+            <a:r>
+              <a:rPr lang="en-US" sz="1300" b="1" i="1" dirty="0">
+                <a:solidFill>
+                  <a:srgbClr val="1C2833"/>
+                </a:solidFill>
+                <a:latin typeface="Georgia" pitchFamily="34" charset="0"/>
+                <a:ea typeface="Georgia" pitchFamily="34" charset="-122"/>
+                <a:cs typeface="Georgia" pitchFamily="34" charset="-120"/>
+              </a:rPr>
+              <a:t>Examples:</a:t>
+            </a:r>
+            <a:endParaRPr lang="en-US" sz="1300" dirty="0"/>
+          </a:p>
+        </p:txBody>
+      </p:sp>
+      <p:sp>
+        <p:nvSpPr>
+          <p:cNvPr id="11" name="Text 9"/>
+          <p:cNvSpPr/>
+          <p:nvPr/>
+        </p:nvSpPr>
+        <p:spPr>
+          <a:xfrm>
+            <a:off x="692051" y="2419499"/>
+            <a:ext cx="7973389" cy="230981"/>
+          </a:xfrm>
+          <a:prstGeom prst="rect">
+            <a:avLst/>
+          </a:prstGeom>
+          <a:noFill/>
+          <a:ln/>
+        </p:spPr>
+        <p:txBody>
+          <a:bodyPr wrap="square" lIns="0" tIns="0" rIns="0" bIns="0" rtlCol="0" anchor="t"/>
+          <a:lstStyle/>
+          <a:p>
+            <a:pPr algn="l" indent="0" marL="0">
+              <a:lnSpc>
+                <a:spcPts val="1820"/>
+              </a:lnSpc>
+              <a:spcBef>
+                <a:spcPts val="300"/>
+              </a:spcBef>
+              <a:spcAft>
+                <a:spcPts val="300"/>
+              </a:spcAft>
+              <a:buNone/>
+            </a:pPr>
+            <a:r>
+              <a:rPr lang="en-US" sz="1300" i="1" dirty="0">
+                <a:solidFill>
+                  <a:srgbClr val="1C2833"/>
+                </a:solidFill>
+                <a:latin typeface="Georgia" pitchFamily="34" charset="0"/>
+                <a:ea typeface="Georgia" pitchFamily="34" charset="-122"/>
+                <a:cs typeface="Georgia" pitchFamily="34" charset="-120"/>
+              </a:rPr>
+              <a:t>33 + 9 = 33 + 10 − 1 = 42</a:t>
+            </a:r>
+            <a:endParaRPr lang="en-US" sz="1300" dirty="0"/>
+          </a:p>
+        </p:txBody>
+      </p:sp>
+      <p:sp>
+        <p:nvSpPr>
+          <p:cNvPr id="12" name="Text 10"/>
+          <p:cNvSpPr/>
+          <p:nvPr/>
+        </p:nvSpPr>
+        <p:spPr>
+          <a:xfrm>
+            <a:off x="692051" y="2688580"/>
+            <a:ext cx="7973389" cy="230981"/>
+          </a:xfrm>
+          <a:prstGeom prst="rect">
+            <a:avLst/>
+          </a:prstGeom>
+          <a:noFill/>
+          <a:ln/>
+        </p:spPr>
+        <p:txBody>
+          <a:bodyPr wrap="square" lIns="0" tIns="0" rIns="0" bIns="0" rtlCol="0" anchor="t"/>
+          <a:lstStyle/>
+          <a:p>
+            <a:pPr algn="l" indent="0" marL="0">
+              <a:lnSpc>
+                <a:spcPts val="1820"/>
+              </a:lnSpc>
+              <a:spcBef>
+                <a:spcPts val="300"/>
+              </a:spcBef>
+              <a:spcAft>
+                <a:spcPts val="300"/>
+              </a:spcAft>
+              <a:buNone/>
+            </a:pPr>
+            <a:r>
+              <a:rPr lang="en-US" sz="1300" i="1" dirty="0">
+                <a:solidFill>
+                  <a:srgbClr val="1C2833"/>
+                </a:solidFill>
+                <a:latin typeface="Georgia" pitchFamily="34" charset="0"/>
+                <a:ea typeface="Georgia" pitchFamily="34" charset="-122"/>
+                <a:cs typeface="Georgia" pitchFamily="34" charset="-120"/>
+              </a:rPr>
+              <a:t>47 + 19 = 47 + 20 − 1 = 66</a:t>
+            </a:r>
+            <a:endParaRPr lang="en-US" sz="1300" dirty="0"/>
+          </a:p>
+        </p:txBody>
+      </p:sp>
+      <p:sp>
+        <p:nvSpPr>
+          <p:cNvPr id="13" name="Text 11"/>
+          <p:cNvSpPr/>
+          <p:nvPr/>
+        </p:nvSpPr>
+        <p:spPr>
+          <a:xfrm>
+            <a:off x="692051" y="2957661"/>
+            <a:ext cx="7973389" cy="230981"/>
+          </a:xfrm>
+          <a:prstGeom prst="rect">
+            <a:avLst/>
+          </a:prstGeom>
+          <a:noFill/>
+          <a:ln/>
+        </p:spPr>
+        <p:txBody>
+          <a:bodyPr wrap="square" lIns="0" tIns="0" rIns="0" bIns="0" rtlCol="0" anchor="t"/>
+          <a:lstStyle/>
+          <a:p>
+            <a:pPr algn="l" indent="0" marL="0">
+              <a:lnSpc>
+                <a:spcPts val="1820"/>
+              </a:lnSpc>
+              <a:spcBef>
+                <a:spcPts val="300"/>
+              </a:spcBef>
+              <a:spcAft>
+                <a:spcPts val="300"/>
+              </a:spcAft>
+              <a:buNone/>
+            </a:pPr>
+            <a:r>
+              <a:rPr lang="en-US" sz="1300" i="1" dirty="0">
+                <a:solidFill>
+                  <a:srgbClr val="1C2833"/>
+                </a:solidFill>
+                <a:latin typeface="Georgia" pitchFamily="34" charset="0"/>
+                <a:ea typeface="Georgia" pitchFamily="34" charset="-122"/>
+                <a:cs typeface="Georgia" pitchFamily="34" charset="-120"/>
+              </a:rPr>
+              <a:t>55 + 48 = 55 + 50 − 2 = 103</a:t>
+            </a:r>
+            <a:endParaRPr lang="en-US" sz="1300" dirty="0"/>
+          </a:p>
+        </p:txBody>
+      </p:sp>
+      <p:sp>
+        <p:nvSpPr>
+          <p:cNvPr id="14" name="Text 12"/>
+          <p:cNvSpPr/>
+          <p:nvPr/>
+        </p:nvSpPr>
+        <p:spPr>
+          <a:xfrm>
+            <a:off x="692051" y="3226743"/>
+            <a:ext cx="7973389" cy="230981"/>
+          </a:xfrm>
+          <a:prstGeom prst="rect">
+            <a:avLst/>
+          </a:prstGeom>
+          <a:noFill/>
+          <a:ln/>
+        </p:spPr>
+        <p:txBody>
+          <a:bodyPr wrap="square" lIns="0" tIns="0" rIns="0" bIns="0" rtlCol="0" anchor="t"/>
+          <a:lstStyle/>
+          <a:p>
+            <a:pPr algn="l" indent="0" marL="0">
+              <a:lnSpc>
+                <a:spcPts val="1820"/>
+              </a:lnSpc>
+              <a:spcBef>
+                <a:spcPts val="300"/>
+              </a:spcBef>
+              <a:spcAft>
+                <a:spcPts val="300"/>
+              </a:spcAft>
+              <a:buNone/>
+            </a:pPr>
+            <a:r>
+              <a:rPr lang="en-US" sz="1300" i="1" dirty="0">
+                <a:solidFill>
+                  <a:srgbClr val="1C2833"/>
+                </a:solidFill>
+                <a:latin typeface="Georgia" pitchFamily="34" charset="0"/>
+                <a:ea typeface="Georgia" pitchFamily="34" charset="-122"/>
+                <a:cs typeface="Georgia" pitchFamily="34" charset="-120"/>
+              </a:rPr>
+              <a:t>234 + 99 = 234 + 100 − 1 = 333</a:t>
+            </a:r>
+            <a:endParaRPr lang="en-US" sz="1300" dirty="0"/>
+          </a:p>
+        </p:txBody>
+      </p:sp>
+      <p:sp>
+        <p:nvSpPr>
+          <p:cNvPr id="15" name="Text 13"/>
+          <p:cNvSpPr/>
+          <p:nvPr/>
+        </p:nvSpPr>
+        <p:spPr>
+          <a:xfrm>
+            <a:off x="692051" y="3495824"/>
+            <a:ext cx="7973389" cy="461963"/>
+          </a:xfrm>
+          <a:prstGeom prst="rect">
+            <a:avLst/>
+          </a:prstGeom>
+          <a:noFill/>
+          <a:ln/>
+        </p:spPr>
+        <p:txBody>
+          <a:bodyPr wrap="square" lIns="0" tIns="0" rIns="0" bIns="0" rtlCol="0" anchor="t"/>
+          <a:lstStyle/>
+          <a:p>
+            <a:pPr algn="l" indent="0" marL="0">
+              <a:lnSpc>
+                <a:spcPts val="1820"/>
+              </a:lnSpc>
+              <a:spcBef>
+                <a:spcPts val="300"/>
+              </a:spcBef>
+              <a:spcAft>
+                <a:spcPts val="300"/>
+              </a:spcAft>
+              <a:buNone/>
+            </a:pPr>
+            <a:r>
+              <a:rPr lang="en-US" sz="1300" dirty="0">
+                <a:solidFill>
+                  <a:srgbClr val="1C2833"/>
+                </a:solidFill>
+                <a:latin typeface="Georgia" pitchFamily="34" charset="0"/>
+                <a:ea typeface="Georgia" pitchFamily="34" charset="-122"/>
+                <a:cs typeface="Georgia" pitchFamily="34" charset="-120"/>
+              </a:rPr>
+              <a:t>This pattern is named in Tirthaji's 7th sūtra: </a:t>
+            </a:r>
+            <a:pPr algn="l" indent="0" marL="0">
+              <a:lnSpc>
+                <a:spcPts val="1820"/>
+              </a:lnSpc>
+              <a:spcBef>
+                <a:spcPts val="300"/>
+              </a:spcBef>
+              <a:spcAft>
+                <a:spcPts val="300"/>
+              </a:spcAft>
+              <a:buNone/>
+            </a:pPr>
+            <a:r>
+              <a:rPr lang="en-US" sz="1300" b="1" i="1" dirty="0">
+                <a:solidFill>
+                  <a:srgbClr val="1C2833"/>
+                </a:solidFill>
+                <a:latin typeface="Georgia" pitchFamily="34" charset="0"/>
+                <a:ea typeface="Georgia" pitchFamily="34" charset="-122"/>
+                <a:cs typeface="Georgia" pitchFamily="34" charset="-120"/>
+              </a:rPr>
+              <a:t>Sankalana Vyavakalanābhyām</a:t>
+            </a:r>
+            <a:pPr algn="l" indent="0" marL="0">
+              <a:lnSpc>
+                <a:spcPts val="1820"/>
+              </a:lnSpc>
+              <a:spcBef>
+                <a:spcPts val="300"/>
+              </a:spcBef>
+              <a:spcAft>
+                <a:spcPts val="300"/>
+              </a:spcAft>
+              <a:buNone/>
+            </a:pPr>
+            <a:r>
+              <a:rPr lang="en-US" sz="1300" dirty="0">
+                <a:solidFill>
+                  <a:srgbClr val="1C2833"/>
+                </a:solidFill>
+                <a:latin typeface="Georgia" pitchFamily="34" charset="0"/>
+                <a:ea typeface="Georgia" pitchFamily="34" charset="-122"/>
+                <a:cs typeface="Georgia" pitchFamily="34" charset="-120"/>
+              </a:rPr>
+              <a:t> — "by addition and by subtraction."</a:t>
+            </a:r>
+            <a:endParaRPr lang="en-US" sz="1300" dirty="0"/>
+          </a:p>
+        </p:txBody>
+      </p:sp>
+      <p:sp>
+        <p:nvSpPr>
+          <p:cNvPr id="16" name="Text 14"/>
+          <p:cNvSpPr/>
+          <p:nvPr/>
+        </p:nvSpPr>
+        <p:spPr>
+          <a:xfrm>
+            <a:off x="406301" y="4434929"/>
+            <a:ext cx="8498026" cy="213271"/>
+          </a:xfrm>
+          <a:prstGeom prst="rect">
+            <a:avLst/>
+          </a:prstGeom>
+          <a:noFill/>
+          <a:ln/>
+        </p:spPr>
+        <p:txBody>
+          <a:bodyPr wrap="square" lIns="0" tIns="0" rIns="0" bIns="0" rtlCol="0" anchor="t"/>
+          <a:lstStyle/>
+          <a:p>
+            <a:pPr algn="l" indent="0" marL="0">
+              <a:lnSpc>
+                <a:spcPts val="1680"/>
+              </a:lnSpc>
+              <a:spcBef>
+                <a:spcPts val="300"/>
+              </a:spcBef>
+              <a:spcAft>
+                <a:spcPts val="300"/>
+              </a:spcAft>
+              <a:buNone/>
+            </a:pPr>
+            <a:r>
+              <a:rPr lang="en-US" sz="1200" dirty="0">
+                <a:solidFill>
+                  <a:srgbClr val="1C2833"/>
+                </a:solidFill>
+                <a:latin typeface="Arial" pitchFamily="34" charset="0"/>
+                <a:ea typeface="Arial" pitchFamily="34" charset="-122"/>
+                <a:cs typeface="Arial" pitchFamily="34" charset="-120"/>
+              </a:rPr>
+              <a:t>Middle ·  · IKS Curriculum</a:t>
+            </a:r>
+            <a:endParaRPr lang="en-US" sz="1200" dirty="0"/>
+          </a:p>
+        </p:txBody>
+      </p:sp>
+    </p:spTree>
+  </p:cSld>
+  <p:clrMapOvr>
+    <a:masterClrMapping/>
+  </p:clrMapOvr>
+</p:sld>
+</file>
+
+<file path=ppt/slides/slide14.xml><?xml version="1.0" encoding="utf-8"?>
+<p:sld xmlns:a="http://schemas.openxmlformats.org/drawingml/2006/main" xmlns:r="http://schemas.openxmlformats.org/officeDocument/2006/relationships" xmlns:p="http://schemas.openxmlformats.org/presentationml/2006/main">
+  <p:cSld name="Slide 14">
+    <p:bg>
+      <p:bgPr>
+        <a:solidFill>
+          <a:srgbClr val="FFFFFF"/>
+        </a:solidFill>
+      </p:bgPr>
+    </p:bg>
+    <p:spTree>
+      <p:nvGrpSpPr>
+        <p:cNvPr id="1" name=""/>
+        <p:cNvGrpSpPr/>
+        <p:nvPr/>
+      </p:nvGrpSpPr>
+      <p:grpSpPr>
+        <a:xfrm>
+          <a:off x="0" y="0"/>
+          <a:ext cx="0" cy="0"/>
+          <a:chOff x="0" y="0"/>
+          <a:chExt cx="0" cy="0"/>
+        </a:xfrm>
+      </p:grpSpPr>
+      <p:sp>
+        <p:nvSpPr>
+          <p:cNvPr id="2" name="Text 0"/>
+          <p:cNvSpPr/>
+          <p:nvPr/>
+        </p:nvSpPr>
+        <p:spPr>
+          <a:xfrm>
+            <a:off x="0" y="0"/>
+            <a:ext cx="9144000" cy="101501"/>
+          </a:xfrm>
+          <a:prstGeom prst="rect">
+            <a:avLst/>
+          </a:prstGeom>
+          <a:solidFill>
+            <a:srgbClr val="277884"/>
+          </a:solidFill>
+          <a:ln/>
+        </p:spPr>
+        <p:txBody>
+          <a:bodyPr wrap="square" rtlCol="0" anchor="ctr"/>
+          <a:lstStyle/>
+          <a:p>
+            <a:pPr indent="0" marL="0">
+              <a:buNone/>
+            </a:pPr>
+            <a:endParaRPr lang="en-US" dirty="0"/>
+          </a:p>
+        </p:txBody>
+      </p:sp>
+      <p:sp>
+        <p:nvSpPr>
+          <p:cNvPr id="3" name="Text 1"/>
+          <p:cNvSpPr/>
+          <p:nvPr/>
+        </p:nvSpPr>
+        <p:spPr>
+          <a:xfrm>
+            <a:off x="406301" y="457051"/>
+            <a:ext cx="8498026" cy="274290"/>
+          </a:xfrm>
+          <a:prstGeom prst="rect">
+            <a:avLst/>
+          </a:prstGeom>
+          <a:noFill/>
+          <a:ln/>
+        </p:spPr>
+        <p:txBody>
+          <a:bodyPr wrap="square" lIns="0" tIns="0" rIns="0" bIns="0" rtlCol="0" anchor="t"/>
+          <a:lstStyle/>
+          <a:p>
+            <a:pPr algn="l" indent="0" marL="0">
+              <a:lnSpc>
+                <a:spcPts val="2160"/>
+              </a:lnSpc>
+              <a:spcBef>
+                <a:spcPts val="600"/>
+              </a:spcBef>
+              <a:spcAft>
+                <a:spcPts val="800"/>
+              </a:spcAft>
+              <a:buNone/>
+            </a:pPr>
+            <a:r>
+              <a:rPr lang="en-US" sz="1800" b="1" dirty="0">
+                <a:solidFill>
+                  <a:srgbClr val="FE4447"/>
+                </a:solidFill>
+                <a:latin typeface="Georgia" pitchFamily="34" charset="0"/>
+                <a:ea typeface="Georgia" pitchFamily="34" charset="-122"/>
+                <a:cs typeface="Georgia" pitchFamily="34" charset="-120"/>
+              </a:rPr>
+              <a:t>Homework</a:t>
+            </a:r>
+            <a:endParaRPr lang="en-US" sz="1800" dirty="0"/>
+          </a:p>
+        </p:txBody>
+      </p:sp>
+      <p:sp>
+        <p:nvSpPr>
+          <p:cNvPr id="4" name="Text 2"/>
+          <p:cNvSpPr/>
+          <p:nvPr/>
+        </p:nvSpPr>
+        <p:spPr>
+          <a:xfrm>
+            <a:off x="634901" y="883593"/>
+            <a:ext cx="8102798" cy="525661"/>
+          </a:xfrm>
+          <a:prstGeom prst="rect">
+            <a:avLst/>
+          </a:prstGeom>
+          <a:noFill/>
+          <a:ln/>
+        </p:spPr>
+        <p:txBody>
+          <a:bodyPr wrap="square" lIns="0" tIns="0" rIns="0" bIns="0" rtlCol="0" anchor="t"/>
+          <a:lstStyle/>
+          <a:p>
+            <a:pPr algn="l" marL="342900" indent="-342900">
+              <a:lnSpc>
+                <a:spcPts val="1620"/>
+              </a:lnSpc>
+              <a:spcAft>
+                <a:spcPts val="300"/>
+              </a:spcAft>
+              <a:buSzPct val="100000"/>
+              <a:buChar char="•"/>
+            </a:pPr>
+            <a:r>
+              <a:rPr lang="en-US" sz="1200" dirty="0">
+                <a:solidFill>
+                  <a:srgbClr val="1C2833"/>
+                </a:solidFill>
+                <a:latin typeface="Arial" pitchFamily="34" charset="0"/>
+                <a:ea typeface="Arial" pitchFamily="34" charset="-122"/>
+                <a:cs typeface="Arial" pitchFamily="34" charset="-120"/>
+              </a:rPr>
+              <a:t>20 mental additions. Do them in under 60 seconds. List on the back of today's worksheet.</a:t>
+            </a:r>
+            <a:endParaRPr lang="en-US" sz="1200" dirty="0"/>
+          </a:p>
+          <a:p>
+            <a:pPr algn="l" marL="342900" indent="-342900">
+              <a:lnSpc>
+                <a:spcPts val="1620"/>
+              </a:lnSpc>
+              <a:spcAft>
+                <a:spcPts val="300"/>
+              </a:spcAft>
+              <a:buSzPct val="100000"/>
+              <a:buChar char="•"/>
+            </a:pPr>
+            <a:r>
+              <a:rPr lang="en-US" sz="1200" dirty="0">
+                <a:solidFill>
+                  <a:srgbClr val="1C2833"/>
+                </a:solidFill>
+                <a:latin typeface="Arial" pitchFamily="34" charset="0"/>
+                <a:ea typeface="Arial" pitchFamily="34" charset="-122"/>
+                <a:cs typeface="Arial" pitchFamily="34" charset="-120"/>
+              </a:rPr>
+              <a:t>Bring all project materials tomorrow.</a:t>
+            </a:r>
+            <a:endParaRPr lang="en-US" sz="1200" dirty="0"/>
+          </a:p>
+        </p:txBody>
+      </p:sp>
+      <p:sp>
+        <p:nvSpPr>
+          <p:cNvPr id="5" name="Text 3"/>
+          <p:cNvSpPr/>
+          <p:nvPr/>
+        </p:nvSpPr>
+        <p:spPr>
+          <a:xfrm>
+            <a:off x="406301" y="4434929"/>
+            <a:ext cx="8498026" cy="213271"/>
+          </a:xfrm>
+          <a:prstGeom prst="rect">
+            <a:avLst/>
+          </a:prstGeom>
+          <a:noFill/>
+          <a:ln/>
+        </p:spPr>
+        <p:txBody>
+          <a:bodyPr wrap="square" lIns="0" tIns="0" rIns="0" bIns="0" rtlCol="0" anchor="t"/>
+          <a:lstStyle/>
+          <a:p>
+            <a:pPr algn="l" indent="0" marL="0">
+              <a:lnSpc>
+                <a:spcPts val="1680"/>
+              </a:lnSpc>
+              <a:spcBef>
+                <a:spcPts val="300"/>
+              </a:spcBef>
+              <a:spcAft>
+                <a:spcPts val="300"/>
+              </a:spcAft>
+              <a:buNone/>
+            </a:pPr>
+            <a:r>
+              <a:rPr lang="en-US" sz="1200" dirty="0">
+                <a:solidFill>
+                  <a:srgbClr val="1C2833"/>
+                </a:solidFill>
+                <a:latin typeface="Arial" pitchFamily="34" charset="0"/>
+                <a:ea typeface="Arial" pitchFamily="34" charset="-122"/>
+                <a:cs typeface="Arial" pitchFamily="34" charset="-120"/>
+              </a:rPr>
+              <a:t>Middle ·  · IKS Curriculum</a:t>
+            </a:r>
+            <a:endParaRPr lang="en-US" sz="1200" dirty="0"/>
+          </a:p>
+        </p:txBody>
+      </p:sp>
+    </p:spTree>
+  </p:cSld>
+  <p:clrMapOvr>
+    <a:masterClrMapping/>
+  </p:clrMapOvr>
+</p:sld>
+</file>
+
+<file path=ppt/slides/slide15.xml><?xml version="1.0" encoding="utf-8"?>
+<p:sld xmlns:a="http://schemas.openxmlformats.org/drawingml/2006/main" xmlns:r="http://schemas.openxmlformats.org/officeDocument/2006/relationships" xmlns:p="http://schemas.openxmlformats.org/presentationml/2006/main">
+  <p:cSld name="Slide 15">
+    <p:bg>
+      <p:bgPr>
+        <a:solidFill>
+          <a:srgbClr val="FFFFFF"/>
+        </a:solidFill>
+      </p:bgPr>
+    </p:bg>
+    <p:spTree>
+      <p:nvGrpSpPr>
+        <p:cNvPr id="1" name=""/>
+        <p:cNvGrpSpPr/>
+        <p:nvPr/>
+      </p:nvGrpSpPr>
+      <p:grpSpPr>
+        <a:xfrm>
+          <a:off x="0" y="0"/>
+          <a:ext cx="0" cy="0"/>
+          <a:chOff x="0" y="0"/>
+          <a:chExt cx="0" cy="0"/>
+        </a:xfrm>
+      </p:grpSpPr>
+      <p:sp>
+        <p:nvSpPr>
+          <p:cNvPr id="2" name="Text 0"/>
+          <p:cNvSpPr/>
+          <p:nvPr/>
+        </p:nvSpPr>
+        <p:spPr>
+          <a:xfrm>
+            <a:off x="0" y="0"/>
+            <a:ext cx="9144000" cy="101501"/>
+          </a:xfrm>
+          <a:prstGeom prst="rect">
+            <a:avLst/>
+          </a:prstGeom>
+          <a:solidFill>
+            <a:srgbClr val="277884"/>
+          </a:solidFill>
+          <a:ln/>
+        </p:spPr>
+        <p:txBody>
+          <a:bodyPr wrap="square" rtlCol="0" anchor="ctr"/>
+          <a:lstStyle/>
+          <a:p>
+            <a:pPr indent="0" marL="0">
+              <a:buNone/>
+            </a:pPr>
+            <a:endParaRPr lang="en-US" dirty="0"/>
+          </a:p>
+        </p:txBody>
+      </p:sp>
+      <p:sp>
+        <p:nvSpPr>
+          <p:cNvPr id="3" name="Text 1"/>
+          <p:cNvSpPr/>
+          <p:nvPr/>
+        </p:nvSpPr>
+        <p:spPr>
+          <a:xfrm>
+            <a:off x="406301" y="457051"/>
+            <a:ext cx="8498026" cy="274290"/>
+          </a:xfrm>
+          <a:prstGeom prst="rect">
+            <a:avLst/>
+          </a:prstGeom>
+          <a:noFill/>
+          <a:ln/>
+        </p:spPr>
+        <p:txBody>
+          <a:bodyPr wrap="square" lIns="0" tIns="0" rIns="0" bIns="0" rtlCol="0" anchor="t"/>
+          <a:lstStyle/>
+          <a:p>
+            <a:pPr algn="l" indent="0" marL="0">
+              <a:lnSpc>
+                <a:spcPts val="2160"/>
+              </a:lnSpc>
+              <a:spcBef>
+                <a:spcPts val="600"/>
+              </a:spcBef>
+              <a:spcAft>
+                <a:spcPts val="800"/>
+              </a:spcAft>
+              <a:buNone/>
+            </a:pPr>
+            <a:r>
+              <a:rPr lang="en-US" sz="1800" b="1" dirty="0">
+                <a:solidFill>
+                  <a:srgbClr val="FE4447"/>
+                </a:solidFill>
+                <a:latin typeface="Georgia" pitchFamily="34" charset="0"/>
+                <a:ea typeface="Georgia" pitchFamily="34" charset="-122"/>
+                <a:cs typeface="Georgia" pitchFamily="34" charset="-120"/>
+              </a:rPr>
+              <a:t>Differentiation</a:t>
+            </a:r>
+            <a:endParaRPr lang="en-US" sz="1800" dirty="0"/>
+          </a:p>
+        </p:txBody>
+      </p:sp>
+      <p:sp>
+        <p:nvSpPr>
+          <p:cNvPr id="4" name="Text 2"/>
+          <p:cNvSpPr/>
+          <p:nvPr/>
+        </p:nvSpPr>
+        <p:spPr>
+          <a:xfrm>
+            <a:off x="634901" y="883593"/>
+            <a:ext cx="8102798" cy="731341"/>
+          </a:xfrm>
+          <a:prstGeom prst="rect">
+            <a:avLst/>
+          </a:prstGeom>
+          <a:noFill/>
+          <a:ln/>
+        </p:spPr>
+        <p:txBody>
+          <a:bodyPr wrap="square" lIns="0" tIns="0" rIns="0" bIns="0" rtlCol="0" anchor="t"/>
+          <a:lstStyle/>
+          <a:p>
+            <a:pPr algn="l" marL="342900" indent="-342900">
+              <a:lnSpc>
+                <a:spcPts val="1620"/>
+              </a:lnSpc>
+              <a:spcAft>
+                <a:spcPts val="300"/>
+              </a:spcAft>
+              <a:buSzPct val="100000"/>
+              <a:buChar char="•"/>
+            </a:pPr>
+            <a:r>
+              <a:rPr lang="en-US" sz="1200" b="1" dirty="0">
+                <a:solidFill>
+                  <a:srgbClr val="1C2833"/>
+                </a:solidFill>
+                <a:latin typeface="Arial" pitchFamily="34" charset="0"/>
+                <a:ea typeface="Arial" pitchFamily="34" charset="-122"/>
+                <a:cs typeface="Arial" pitchFamily="34" charset="-120"/>
+              </a:rPr>
+              <a:t>Tier up:</a:t>
+            </a:r>
+            <a:pPr algn="l" indent="0" marL="0">
+              <a:lnSpc>
+                <a:spcPts val="1620"/>
+              </a:lnSpc>
+              <a:spcAft>
+                <a:spcPts val="300"/>
+              </a:spcAft>
+              <a:buNone/>
+            </a:pPr>
+            <a:r>
+              <a:rPr lang="en-US" sz="1200" dirty="0">
+                <a:solidFill>
+                  <a:srgbClr val="1C2833"/>
+                </a:solidFill>
+                <a:latin typeface="Arial" pitchFamily="34" charset="0"/>
+                <a:ea typeface="Arial" pitchFamily="34" charset="-122"/>
+                <a:cs typeface="Arial" pitchFamily="34" charset="-120"/>
+              </a:rPr>
+              <a:t> Apply the same idea to numbers near 100 (e.g. 234 + 98 = 234 + 100 − 2). Also try 3-digit additions in your head.</a:t>
+            </a:r>
+            <a:endParaRPr lang="en-US" sz="1200" dirty="0"/>
+          </a:p>
+          <a:p>
+            <a:pPr algn="l" marL="342900" indent="-342900">
+              <a:lnSpc>
+                <a:spcPts val="1620"/>
+              </a:lnSpc>
+              <a:spcAft>
+                <a:spcPts val="300"/>
+              </a:spcAft>
+              <a:buSzPct val="100000"/>
+              <a:buChar char="•"/>
+            </a:pPr>
+            <a:r>
+              <a:rPr lang="en-US" sz="1200" b="1" dirty="0">
+                <a:solidFill>
+                  <a:srgbClr val="1C2833"/>
+                </a:solidFill>
+                <a:latin typeface="Arial" pitchFamily="34" charset="0"/>
+                <a:ea typeface="Arial" pitchFamily="34" charset="-122"/>
+                <a:cs typeface="Arial" pitchFamily="34" charset="-120"/>
+              </a:rPr>
+              <a:t>Tier down:</a:t>
+            </a:r>
+            <a:pPr algn="l" indent="0" marL="0">
+              <a:lnSpc>
+                <a:spcPts val="1620"/>
+              </a:lnSpc>
+              <a:spcAft>
+                <a:spcPts val="300"/>
+              </a:spcAft>
+              <a:buNone/>
+            </a:pPr>
+            <a:r>
+              <a:rPr lang="en-US" sz="1200" dirty="0">
+                <a:solidFill>
+                  <a:srgbClr val="1C2833"/>
+                </a:solidFill>
+                <a:latin typeface="Arial" pitchFamily="34" charset="0"/>
+                <a:ea typeface="Arial" pitchFamily="34" charset="-122"/>
+                <a:cs typeface="Arial" pitchFamily="34" charset="-120"/>
+              </a:rPr>
+              <a:t> Stick to "+9" first. Once that's automatic, add "+19, +29, +39." Build up.</a:t>
+            </a:r>
+            <a:endParaRPr lang="en-US" sz="1200" dirty="0"/>
+          </a:p>
+        </p:txBody>
+      </p:sp>
+      <p:sp>
+        <p:nvSpPr>
+          <p:cNvPr id="5" name="Text 3"/>
+          <p:cNvSpPr/>
+          <p:nvPr/>
+        </p:nvSpPr>
+        <p:spPr>
+          <a:xfrm>
+            <a:off x="406301" y="4434929"/>
+            <a:ext cx="8498026" cy="213271"/>
+          </a:xfrm>
+          <a:prstGeom prst="rect">
+            <a:avLst/>
+          </a:prstGeom>
+          <a:noFill/>
+          <a:ln/>
+        </p:spPr>
+        <p:txBody>
+          <a:bodyPr wrap="square" lIns="0" tIns="0" rIns="0" bIns="0" rtlCol="0" anchor="t"/>
+          <a:lstStyle/>
+          <a:p>
+            <a:pPr algn="l" indent="0" marL="0">
+              <a:lnSpc>
+                <a:spcPts val="1680"/>
+              </a:lnSpc>
+              <a:spcBef>
+                <a:spcPts val="300"/>
+              </a:spcBef>
+              <a:spcAft>
+                <a:spcPts val="300"/>
+              </a:spcAft>
+              <a:buNone/>
+            </a:pPr>
+            <a:r>
+              <a:rPr lang="en-US" sz="1200" dirty="0">
+                <a:solidFill>
+                  <a:srgbClr val="1C2833"/>
+                </a:solidFill>
+                <a:latin typeface="Arial" pitchFamily="34" charset="0"/>
+                <a:ea typeface="Arial" pitchFamily="34" charset="-122"/>
+                <a:cs typeface="Arial" pitchFamily="34" charset="-120"/>
+              </a:rPr>
+              <a:t>Middle ·  · IKS Curriculum</a:t>
+            </a:r>
+            <a:endParaRPr lang="en-US" sz="1200" dirty="0"/>
+          </a:p>
+        </p:txBody>
+      </p:sp>
+    </p:spTree>
+  </p:cSld>
+  <p:clrMapOvr>
+    <a:masterClrMapping/>
+  </p:clrMapOvr>
+</p:sld>
+</file>
+
+<file path=ppt/slides/slide16.xml><?xml version="1.0" encoding="utf-8"?>
+<p:sld xmlns:a="http://schemas.openxmlformats.org/drawingml/2006/main" xmlns:r="http://schemas.openxmlformats.org/officeDocument/2006/relationships" xmlns:p="http://schemas.openxmlformats.org/presentationml/2006/main">
+  <p:cSld name="Slide 16">
+    <p:bg>
+      <p:bgPr>
+        <a:solidFill>
+          <a:srgbClr val="FFFFFF"/>
+        </a:solidFill>
+      </p:bgPr>
+    </p:bg>
+    <p:spTree>
+      <p:nvGrpSpPr>
+        <p:cNvPr id="1" name=""/>
+        <p:cNvGrpSpPr/>
+        <p:nvPr/>
+      </p:nvGrpSpPr>
+      <p:grpSpPr>
+        <a:xfrm>
+          <a:off x="0" y="0"/>
+          <a:ext cx="0" cy="0"/>
+          <a:chOff x="0" y="0"/>
+          <a:chExt cx="0" cy="0"/>
+        </a:xfrm>
+      </p:grpSpPr>
+      <p:sp>
+        <p:nvSpPr>
+          <p:cNvPr id="2" name="Text 0"/>
+          <p:cNvSpPr/>
+          <p:nvPr/>
+        </p:nvSpPr>
+        <p:spPr>
+          <a:xfrm>
+            <a:off x="0" y="0"/>
+            <a:ext cx="9144000" cy="101501"/>
+          </a:xfrm>
+          <a:prstGeom prst="rect">
+            <a:avLst/>
+          </a:prstGeom>
+          <a:solidFill>
+            <a:srgbClr val="277884"/>
+          </a:solidFill>
+          <a:ln/>
+        </p:spPr>
+        <p:txBody>
+          <a:bodyPr wrap="square" rtlCol="0" anchor="ctr"/>
+          <a:lstStyle/>
+          <a:p>
+            <a:pPr indent="0" marL="0">
+              <a:buNone/>
+            </a:pPr>
+            <a:endParaRPr lang="en-US" dirty="0"/>
+          </a:p>
+        </p:txBody>
+      </p:sp>
+      <p:sp>
+        <p:nvSpPr>
+          <p:cNvPr id="3" name="Text 1"/>
+          <p:cNvSpPr/>
+          <p:nvPr/>
+        </p:nvSpPr>
+        <p:spPr>
+          <a:xfrm>
+            <a:off x="406301" y="457051"/>
+            <a:ext cx="8498026" cy="274290"/>
+          </a:xfrm>
+          <a:prstGeom prst="rect">
+            <a:avLst/>
+          </a:prstGeom>
+          <a:noFill/>
+          <a:ln/>
+        </p:spPr>
+        <p:txBody>
+          <a:bodyPr wrap="square" lIns="0" tIns="0" rIns="0" bIns="0" rtlCol="0" anchor="t"/>
+          <a:lstStyle/>
+          <a:p>
+            <a:pPr algn="l" indent="0" marL="0">
+              <a:lnSpc>
+                <a:spcPts val="2160"/>
+              </a:lnSpc>
+              <a:spcBef>
+                <a:spcPts val="600"/>
+              </a:spcBef>
+              <a:spcAft>
+                <a:spcPts val="800"/>
+              </a:spcAft>
+              <a:buNone/>
+            </a:pPr>
+            <a:r>
+              <a:rPr lang="en-US" sz="1800" b="1" dirty="0">
+                <a:solidFill>
+                  <a:srgbClr val="FE4447"/>
+                </a:solidFill>
+                <a:latin typeface="Georgia" pitchFamily="34" charset="0"/>
+                <a:ea typeface="Georgia" pitchFamily="34" charset="-122"/>
+                <a:cs typeface="Georgia" pitchFamily="34" charset="-120"/>
+              </a:rPr>
+              <a:t>Teacher notes</a:t>
+            </a:r>
+            <a:endParaRPr lang="en-US" sz="1800" dirty="0"/>
+          </a:p>
+        </p:txBody>
+      </p:sp>
+      <p:sp>
+        <p:nvSpPr>
+          <p:cNvPr id="4" name="Text 2"/>
+          <p:cNvSpPr/>
+          <p:nvPr/>
+        </p:nvSpPr>
+        <p:spPr>
+          <a:xfrm>
+            <a:off x="634901" y="883593"/>
+            <a:ext cx="8102798" cy="937022"/>
+          </a:xfrm>
+          <a:prstGeom prst="rect">
+            <a:avLst/>
+          </a:prstGeom>
+          <a:noFill/>
+          <a:ln/>
+        </p:spPr>
+        <p:txBody>
+          <a:bodyPr wrap="square" lIns="0" tIns="0" rIns="0" bIns="0" rtlCol="0" anchor="t"/>
+          <a:lstStyle/>
+          <a:p>
+            <a:pPr algn="l" marL="342900" indent="-342900">
+              <a:lnSpc>
+                <a:spcPts val="1620"/>
+              </a:lnSpc>
+              <a:spcAft>
+                <a:spcPts val="300"/>
+              </a:spcAft>
+              <a:buSzPct val="100000"/>
+              <a:buChar char="•"/>
+            </a:pPr>
+            <a:r>
+              <a:rPr lang="en-US" sz="1200" dirty="0">
+                <a:solidFill>
+                  <a:srgbClr val="1C2833"/>
+                </a:solidFill>
+                <a:latin typeface="Arial" pitchFamily="34" charset="0"/>
+                <a:ea typeface="Arial" pitchFamily="34" charset="-122"/>
+                <a:cs typeface="Arial" pitchFamily="34" charset="-120"/>
+              </a:rPr>
+              <a:t>Some students will object: "But subtracting is HARDER than adding." Not really — subtracting 1 or 2 is trivial once you've done the bigger jump. Push through the initial resistance with the drills.</a:t>
+            </a:r>
+            <a:endParaRPr lang="en-US" sz="1200" dirty="0"/>
+          </a:p>
+          <a:p>
+            <a:pPr algn="l" marL="342900" indent="-342900">
+              <a:lnSpc>
+                <a:spcPts val="1620"/>
+              </a:lnSpc>
+              <a:spcAft>
+                <a:spcPts val="300"/>
+              </a:spcAft>
+              <a:buSzPct val="100000"/>
+              <a:buChar char="•"/>
+            </a:pPr>
+            <a:r>
+              <a:rPr lang="en-US" sz="1200" dirty="0">
+                <a:solidFill>
+                  <a:srgbClr val="1C2833"/>
+                </a:solidFill>
+                <a:latin typeface="Arial" pitchFamily="34" charset="0"/>
+                <a:ea typeface="Arial" pitchFamily="34" charset="-122"/>
+                <a:cs typeface="Arial" pitchFamily="34" charset="-120"/>
+              </a:rPr>
+              <a:t>This lesson is also a preview of Module 9 (Subtraction by Complements). Don't elaborate now; just note that </a:t>
+            </a:r>
+            <a:pPr algn="l" indent="0" marL="0">
+              <a:lnSpc>
+                <a:spcPts val="1620"/>
+              </a:lnSpc>
+              <a:spcAft>
+                <a:spcPts val="300"/>
+              </a:spcAft>
+              <a:buNone/>
+            </a:pPr>
+            <a:r>
+              <a:rPr lang="en-US" sz="1200" i="1" dirty="0">
+                <a:solidFill>
+                  <a:srgbClr val="1C2833"/>
+                </a:solidFill>
+                <a:latin typeface="Arial" pitchFamily="34" charset="0"/>
+                <a:ea typeface="Arial" pitchFamily="34" charset="-122"/>
+                <a:cs typeface="Arial" pitchFamily="34" charset="-120"/>
+              </a:rPr>
+              <a:t>Nikhilam</a:t>
+            </a:r>
+            <a:pPr algn="l" indent="0" marL="0">
+              <a:lnSpc>
+                <a:spcPts val="1620"/>
+              </a:lnSpc>
+              <a:spcAft>
+                <a:spcPts val="300"/>
+              </a:spcAft>
+              <a:buNone/>
+            </a:pPr>
+            <a:r>
+              <a:rPr lang="en-US" sz="1200" dirty="0">
+                <a:solidFill>
+                  <a:srgbClr val="1C2833"/>
+                </a:solidFill>
+                <a:latin typeface="Arial" pitchFamily="34" charset="0"/>
+                <a:ea typeface="Arial" pitchFamily="34" charset="-122"/>
+                <a:cs typeface="Arial" pitchFamily="34" charset="-120"/>
+              </a:rPr>
+              <a:t> (sūtra #2) and other complement techniques are coming.</a:t>
+            </a:r>
+            <a:endParaRPr lang="en-US" sz="1200" dirty="0"/>
+          </a:p>
+        </p:txBody>
+      </p:sp>
+      <p:sp>
+        <p:nvSpPr>
+          <p:cNvPr id="5" name="Text 3"/>
+          <p:cNvSpPr/>
+          <p:nvPr/>
+        </p:nvSpPr>
+        <p:spPr>
+          <a:xfrm>
+            <a:off x="406301" y="4434929"/>
+            <a:ext cx="8498026" cy="213271"/>
+          </a:xfrm>
+          <a:prstGeom prst="rect">
+            <a:avLst/>
+          </a:prstGeom>
+          <a:noFill/>
+          <a:ln/>
+        </p:spPr>
+        <p:txBody>
+          <a:bodyPr wrap="square" lIns="0" tIns="0" rIns="0" bIns="0" rtlCol="0" anchor="t"/>
+          <a:lstStyle/>
+          <a:p>
+            <a:pPr algn="l" indent="0" marL="0">
+              <a:lnSpc>
+                <a:spcPts val="1680"/>
+              </a:lnSpc>
+              <a:spcBef>
+                <a:spcPts val="300"/>
+              </a:spcBef>
+              <a:spcAft>
+                <a:spcPts val="300"/>
+              </a:spcAft>
+              <a:buNone/>
+            </a:pPr>
+            <a:r>
+              <a:rPr lang="en-US" sz="1200" dirty="0">
+                <a:solidFill>
+                  <a:srgbClr val="1C2833"/>
+                </a:solidFill>
+                <a:latin typeface="Arial" pitchFamily="34" charset="0"/>
+                <a:ea typeface="Arial" pitchFamily="34" charset="-122"/>
+                <a:cs typeface="Arial" pitchFamily="34" charset="-120"/>
+              </a:rPr>
+              <a:t>Middle ·  · IKS Curriculum</a:t>
+            </a:r>
+            <a:endParaRPr lang="en-US" sz="1200" dirty="0"/>
+          </a:p>
+        </p:txBody>
+      </p:sp>
+    </p:spTree>
+  </p:cSld>
+  <p:clrMapOvr>
+    <a:masterClrMapping/>
+  </p:clrMapOvr>
+</p:sld>
+</file>
+
+<file path=ppt/slides/slide17.xml><?xml version="1.0" encoding="utf-8"?>
+<p:sld xmlns:a="http://schemas.openxmlformats.org/drawingml/2006/main" xmlns:r="http://schemas.openxmlformats.org/officeDocument/2006/relationships" xmlns:p="http://schemas.openxmlformats.org/presentationml/2006/main">
+  <p:cSld name="Slide 17">
+    <p:bg>
+      <p:bgPr>
+        <a:solidFill>
+          <a:srgbClr val="FFFFFF"/>
+        </a:solidFill>
+      </p:bgPr>
+    </p:bg>
+    <p:spTree>
+      <p:nvGrpSpPr>
+        <p:cNvPr id="1" name=""/>
+        <p:cNvGrpSpPr/>
+        <p:nvPr/>
+      </p:nvGrpSpPr>
+      <p:grpSpPr>
+        <a:xfrm>
+          <a:off x="0" y="0"/>
+          <a:ext cx="0" cy="0"/>
+          <a:chOff x="0" y="0"/>
+          <a:chExt cx="0" cy="0"/>
+        </a:xfrm>
+      </p:grpSpPr>
+      <p:sp>
+        <p:nvSpPr>
+          <p:cNvPr id="2" name="Text 0"/>
+          <p:cNvSpPr/>
+          <p:nvPr/>
+        </p:nvSpPr>
+        <p:spPr>
+          <a:xfrm>
+            <a:off x="0" y="0"/>
+            <a:ext cx="9144000" cy="101501"/>
+          </a:xfrm>
+          <a:prstGeom prst="rect">
+            <a:avLst/>
+          </a:prstGeom>
+          <a:solidFill>
+            <a:srgbClr val="277884"/>
+          </a:solidFill>
+          <a:ln/>
+        </p:spPr>
+        <p:txBody>
+          <a:bodyPr wrap="square" rtlCol="0" anchor="ctr"/>
+          <a:lstStyle/>
+          <a:p>
+            <a:pPr indent="0" marL="0">
+              <a:buNone/>
+            </a:pPr>
+            <a:endParaRPr lang="en-US" dirty="0"/>
+          </a:p>
+        </p:txBody>
+      </p:sp>
+      <p:sp>
+        <p:nvSpPr>
+          <p:cNvPr id="3" name="Text 1"/>
+          <p:cNvSpPr/>
+          <p:nvPr/>
+        </p:nvSpPr>
+        <p:spPr>
+          <a:xfrm>
+            <a:off x="406301" y="457051"/>
+            <a:ext cx="8498026" cy="274290"/>
+          </a:xfrm>
+          <a:prstGeom prst="rect">
+            <a:avLst/>
+          </a:prstGeom>
+          <a:noFill/>
+          <a:ln/>
+        </p:spPr>
+        <p:txBody>
+          <a:bodyPr wrap="square" lIns="0" tIns="0" rIns="0" bIns="0" rtlCol="0" anchor="t"/>
+          <a:lstStyle/>
+          <a:p>
+            <a:pPr algn="l" indent="0" marL="0">
+              <a:lnSpc>
+                <a:spcPts val="2160"/>
+              </a:lnSpc>
+              <a:spcBef>
+                <a:spcPts val="600"/>
+              </a:spcBef>
+              <a:spcAft>
+                <a:spcPts val="800"/>
+              </a:spcAft>
+              <a:buNone/>
+            </a:pPr>
+            <a:r>
+              <a:rPr lang="en-US" sz="1800" b="1" dirty="0">
+                <a:solidFill>
+                  <a:srgbClr val="FE4447"/>
+                </a:solidFill>
+                <a:latin typeface="Georgia" pitchFamily="34" charset="0"/>
+                <a:ea typeface="Georgia" pitchFamily="34" charset="-122"/>
+                <a:cs typeface="Georgia" pitchFamily="34" charset="-120"/>
+              </a:rPr>
               <a:t>Citation(s) used in this lesson</a:t>
             </a:r>
             <a:endParaRPr lang="en-US" sz="1800" dirty="0"/>
@@ -3128,7 +5360,7 @@
                 <a:ea typeface="Georgia" pitchFamily="34" charset="-122"/>
                 <a:cs typeface="Georgia" pitchFamily="34" charset="-120"/>
               </a:rPr>
-              <a:t>Materials</a:t>
+              <a:t>Learning objective</a:t>
             </a:r>
             <a:endParaRPr lang="en-US" sz="1800" dirty="0"/>
           </a:p>
@@ -3143,7 +5375,7 @@
         <p:spPr>
           <a:xfrm>
             <a:off x="406301" y="870942"/>
-            <a:ext cx="8498026" cy="222796"/>
+            <a:ext cx="8498026" cy="426541"/>
           </a:xfrm>
           <a:prstGeom prst="rect">
             <a:avLst/>
@@ -3176,53 +5408,7 @@
                 <a:ea typeface="Arial" pitchFamily="34" charset="-122"/>
                 <a:cs typeface="Arial" pitchFamily="34" charset="-120"/>
               </a:rPr>
-              <a:t>– Whiteboard. – Drill sheet for Activity 02 (</a:t>
-            </a:r>
-            <a:pPr algn="l" indent="0" marL="0">
-              <a:lnSpc>
-                <a:spcPts val="1680"/>
-              </a:lnSpc>
-              <a:spcBef>
-                <a:spcPts val="300"/>
-              </a:spcBef>
-              <a:spcAft>
-                <a:spcPts val="300"/>
-              </a:spcAft>
-              <a:buNone/>
-            </a:pPr>
-            <a:r>
-              <a:rPr lang="en-US" sz="1200" dirty="0">
-                <a:solidFill>
-                  <a:srgbClr val="1C2833"/>
-                </a:solidFill>
-                <a:latin typeface="Arial" pitchFamily="34" charset="0"/>
-                <a:ea typeface="Arial" pitchFamily="34" charset="-122"/>
-                <a:cs typeface="Arial" pitchFamily="34" charset="-120"/>
-              </a:rPr>
-              <a:t>activities/activity-02-near-base.md</a:t>
-            </a:r>
-            <a:pPr algn="l" indent="0" marL="0">
-              <a:lnSpc>
-                <a:spcPts val="1680"/>
-              </a:lnSpc>
-              <a:spcBef>
-                <a:spcPts val="300"/>
-              </a:spcBef>
-              <a:spcAft>
-                <a:spcPts val="300"/>
-              </a:spcAft>
-              <a:buNone/>
-            </a:pPr>
-            <a:r>
-              <a:rPr lang="en-US" sz="1200" dirty="0">
-                <a:solidFill>
-                  <a:srgbClr val="1C2833"/>
-                </a:solidFill>
-                <a:latin typeface="Arial" pitchFamily="34" charset="0"/>
-                <a:ea typeface="Arial" pitchFamily="34" charset="-122"/>
-                <a:cs typeface="Arial" pitchFamily="34" charset="-120"/>
-              </a:rPr>
-              <a:t>). – Stopwatch per pair.</a:t>
+              <a:t>By the end of this lesson, students will add 2-digit numbers ending in 9, 19, 29, ... (or 8, 18, 28, ...) mentally, by adding the round base and subtracting the deficiency.</a:t>
             </a:r>
             <a:endParaRPr lang="en-US" sz="1200" dirty="0"/>
           </a:p>
@@ -3380,7 +5566,7 @@
                 <a:ea typeface="Georgia" pitchFamily="34" charset="-122"/>
                 <a:cs typeface="Georgia" pitchFamily="34" charset="-120"/>
               </a:rPr>
-              <a:t>Lesson flow</a:t>
+              <a:t>Materials</a:t>
             </a:r>
             <a:endParaRPr lang="en-US" sz="1800" dirty="0"/>
           </a:p>
@@ -3389,6 +5575,140 @@
       <p:sp>
         <p:nvSpPr>
           <p:cNvPr id="4" name="Text 2"/>
+          <p:cNvSpPr/>
+          <p:nvPr/>
+        </p:nvSpPr>
+        <p:spPr>
+          <a:xfrm>
+            <a:off x="634901" y="883593"/>
+            <a:ext cx="8102798" cy="788491"/>
+          </a:xfrm>
+          <a:prstGeom prst="rect">
+            <a:avLst/>
+          </a:prstGeom>
+          <a:noFill/>
+          <a:ln/>
+        </p:spPr>
+        <p:txBody>
+          <a:bodyPr wrap="square" lIns="0" tIns="0" rIns="0" bIns="0" rtlCol="0" anchor="t"/>
+          <a:lstStyle/>
+          <a:p>
+            <a:pPr algn="l" marL="342900" indent="-342900">
+              <a:lnSpc>
+                <a:spcPts val="1620"/>
+              </a:lnSpc>
+              <a:spcAft>
+                <a:spcPts val="300"/>
+              </a:spcAft>
+              <a:buSzPct val="100000"/>
+              <a:buChar char="•"/>
+            </a:pPr>
+            <a:r>
+              <a:rPr lang="en-US" sz="1200" dirty="0">
+                <a:solidFill>
+                  <a:srgbClr val="1C2833"/>
+                </a:solidFill>
+                <a:latin typeface="Arial" pitchFamily="34" charset="0"/>
+                <a:ea typeface="Arial" pitchFamily="34" charset="-122"/>
+                <a:cs typeface="Arial" pitchFamily="34" charset="-120"/>
+              </a:rPr>
+              <a:t>Whiteboard.</a:t>
+            </a:r>
+            <a:endParaRPr lang="en-US" sz="1200" dirty="0"/>
+          </a:p>
+          <a:p>
+            <a:pPr algn="l" marL="342900" indent="-342900">
+              <a:lnSpc>
+                <a:spcPts val="1620"/>
+              </a:lnSpc>
+              <a:spcAft>
+                <a:spcPts val="300"/>
+              </a:spcAft>
+              <a:buSzPct val="100000"/>
+              <a:buChar char="•"/>
+            </a:pPr>
+            <a:r>
+              <a:rPr lang="en-US" sz="1200" dirty="0">
+                <a:solidFill>
+                  <a:srgbClr val="1C2833"/>
+                </a:solidFill>
+                <a:latin typeface="Arial" pitchFamily="34" charset="0"/>
+                <a:ea typeface="Arial" pitchFamily="34" charset="-122"/>
+                <a:cs typeface="Arial" pitchFamily="34" charset="-120"/>
+              </a:rPr>
+              <a:t>Drill sheet for Activity 02 (</a:t>
+            </a:r>
+            <a:pPr algn="l" indent="0" marL="0">
+              <a:lnSpc>
+                <a:spcPts val="1620"/>
+              </a:lnSpc>
+              <a:spcAft>
+                <a:spcPts val="300"/>
+              </a:spcAft>
+              <a:buNone/>
+            </a:pPr>
+            <a:r>
+              <a:rPr lang="en-US" sz="1200" dirty="0">
+                <a:solidFill>
+                  <a:srgbClr val="1C2833"/>
+                </a:solidFill>
+                <a:latin typeface="Arial" pitchFamily="34" charset="0"/>
+                <a:ea typeface="Arial" pitchFamily="34" charset="-122"/>
+                <a:cs typeface="Arial" pitchFamily="34" charset="-120"/>
+              </a:rPr>
+              <a:t>activities/activity-02-near-base.md</a:t>
+            </a:r>
+            <a:pPr algn="l" indent="0" marL="0">
+              <a:lnSpc>
+                <a:spcPts val="1620"/>
+              </a:lnSpc>
+              <a:spcAft>
+                <a:spcPts val="300"/>
+              </a:spcAft>
+              <a:buNone/>
+            </a:pPr>
+            <a:r>
+              <a:rPr lang="en-US" sz="1200" dirty="0">
+                <a:solidFill>
+                  <a:srgbClr val="1C2833"/>
+                </a:solidFill>
+                <a:latin typeface="Arial" pitchFamily="34" charset="0"/>
+                <a:ea typeface="Arial" pitchFamily="34" charset="-122"/>
+                <a:cs typeface="Arial" pitchFamily="34" charset="-120"/>
+              </a:rPr>
+              <a:t>).</a:t>
+            </a:r>
+            <a:endParaRPr lang="en-US" sz="1200" dirty="0"/>
+          </a:p>
+          <a:p>
+            <a:pPr algn="l" marL="342900" indent="-342900">
+              <a:lnSpc>
+                <a:spcPts val="1620"/>
+              </a:lnSpc>
+              <a:spcAft>
+                <a:spcPts val="300"/>
+              </a:spcAft>
+              <a:buSzPct val="100000"/>
+              <a:buChar char="•"/>
+            </a:pPr>
+            <a:r>
+              <a:rPr lang="en-US" sz="1200" dirty="0">
+                <a:solidFill>
+                  <a:srgbClr val="1C2833"/>
+                </a:solidFill>
+                <a:latin typeface="Arial" pitchFamily="34" charset="0"/>
+                <a:ea typeface="Arial" pitchFamily="34" charset="-122"/>
+                <a:cs typeface="Arial" pitchFamily="34" charset="-120"/>
+              </a:rPr>
+              <a:t>Stopwatch per pair.</a:t>
+            </a:r>
+            <a:endParaRPr lang="en-US" sz="1200" dirty="0"/>
+          </a:p>
+        </p:txBody>
+      </p:sp>
+      <p:sp>
+        <p:nvSpPr>
+          <p:cNvPr id="5" name="Text 3"/>
           <p:cNvSpPr/>
           <p:nvPr/>
         </p:nvSpPr>
@@ -3538,7 +5858,7 @@
                 <a:ea typeface="Georgia" pitchFamily="34" charset="-122"/>
                 <a:cs typeface="Georgia" pitchFamily="34" charset="-120"/>
               </a:rPr>
-              <a:t>Warm-up (5 min)</a:t>
+              <a:t>Lesson flow</a:t>
             </a:r>
             <a:endParaRPr lang="en-US" sz="1800" dirty="0"/>
           </a:p>
@@ -3547,100 +5867,6 @@
       <p:sp>
         <p:nvSpPr>
           <p:cNvPr id="4" name="Text 2"/>
-          <p:cNvSpPr/>
-          <p:nvPr/>
-        </p:nvSpPr>
-        <p:spPr>
-          <a:xfrm>
-            <a:off x="406301" y="870942"/>
-            <a:ext cx="8498026" cy="426541"/>
-          </a:xfrm>
-          <a:prstGeom prst="rect">
-            <a:avLst/>
-          </a:prstGeom>
-          <a:noFill/>
-          <a:ln/>
-        </p:spPr>
-        <p:txBody>
-          <a:bodyPr wrap="square" lIns="0" tIns="0" rIns="0" bIns="0" rtlCol="0" anchor="t"/>
-          <a:lstStyle/>
-          <a:p>
-            <a:pPr algn="l" indent="0" marL="0">
-              <a:lnSpc>
-                <a:spcPts val="1680"/>
-              </a:lnSpc>
-              <a:spcBef>
-                <a:spcPts val="300"/>
-              </a:spcBef>
-              <a:spcAft>
-                <a:spcPts val="300"/>
-              </a:spcAft>
-              <a:buNone/>
-            </a:pPr>
-            <a:r>
-              <a:rPr lang="en-US" sz="1200" dirty="0">
-                <a:solidFill>
-                  <a:srgbClr val="1C2833"/>
-                </a:solidFill>
-                <a:latin typeface="Arial" pitchFamily="34" charset="0"/>
-                <a:ea typeface="Arial" pitchFamily="34" charset="-122"/>
-                <a:cs typeface="Arial" pitchFamily="34" charset="-120"/>
-              </a:rPr>
-              <a:t>– Make-10 round. – Quick recall: </a:t>
-            </a:r>
-            <a:pPr algn="l" indent="0" marL="0">
-              <a:lnSpc>
-                <a:spcPts val="1680"/>
-              </a:lnSpc>
-              <a:spcBef>
-                <a:spcPts val="300"/>
-              </a:spcBef>
-              <a:spcAft>
-                <a:spcPts val="300"/>
-              </a:spcAft>
-              <a:buNone/>
-            </a:pPr>
-            <a:r>
-              <a:rPr lang="en-US" sz="1200" i="1" dirty="0">
-                <a:solidFill>
-                  <a:srgbClr val="1C2833"/>
-                </a:solidFill>
-                <a:latin typeface="Arial" pitchFamily="34" charset="0"/>
-                <a:ea typeface="Arial" pitchFamily="34" charset="-122"/>
-                <a:cs typeface="Arial" pitchFamily="34" charset="-120"/>
-              </a:rPr>
-              <a:t>"In yesterday's writing, what was the most surprising place where you 'complete to 10' without thinking?"</a:t>
-            </a:r>
-            <a:pPr algn="l" indent="0" marL="0">
-              <a:lnSpc>
-                <a:spcPts val="1680"/>
-              </a:lnSpc>
-              <a:spcBef>
-                <a:spcPts val="300"/>
-              </a:spcBef>
-              <a:spcAft>
-                <a:spcPts val="300"/>
-              </a:spcAft>
-              <a:buNone/>
-            </a:pPr>
-            <a:r>
-              <a:rPr lang="en-US" sz="1200" dirty="0">
-                <a:solidFill>
-                  <a:srgbClr val="1C2833"/>
-                </a:solidFill>
-                <a:latin typeface="Arial" pitchFamily="34" charset="0"/>
-                <a:ea typeface="Arial" pitchFamily="34" charset="-122"/>
-                <a:cs typeface="Arial" pitchFamily="34" charset="-120"/>
-              </a:rPr>
-              <a:t> — 2 student shares.</a:t>
-            </a:r>
-            <a:endParaRPr lang="en-US" sz="1200" dirty="0"/>
-          </a:p>
-        </p:txBody>
-      </p:sp>
-      <p:sp>
-        <p:nvSpPr>
-          <p:cNvPr id="5" name="Text 3"/>
           <p:cNvSpPr/>
           <p:nvPr/>
         </p:nvSpPr>
@@ -3790,7 +6016,7 @@
                 <a:ea typeface="Georgia" pitchFamily="34" charset="-122"/>
                 <a:cs typeface="Georgia" pitchFamily="34" charset="-120"/>
               </a:rPr>
-              <a:t>Core (15 min) — The "near-base" pattern</a:t>
+              <a:t>Warm-up (5 min)</a:t>
             </a:r>
             <a:endParaRPr lang="en-US" sz="1800" dirty="0"/>
           </a:p>
@@ -3805,7 +6031,7 @@
         <p:spPr>
           <a:xfrm>
             <a:off x="634901" y="883593"/>
-            <a:ext cx="8102798" cy="281880"/>
+            <a:ext cx="8102798" cy="731341"/>
           </a:xfrm>
           <a:prstGeom prst="rect">
             <a:avLst/>
@@ -3836,139 +6062,20 @@
                 <a:ea typeface="Arial" pitchFamily="34" charset="-122"/>
                 <a:cs typeface="Arial" pitchFamily="34" charset="-120"/>
               </a:rPr>
-              <a:t>Write on board:</a:t>
+              <a:t>Make-10 round.</a:t>
             </a:r>
             <a:endParaRPr lang="en-US" sz="1200" dirty="0"/>
           </a:p>
-        </p:txBody>
-      </p:sp>
-      <p:sp>
-        <p:nvSpPr>
-          <p:cNvPr id="5" name="Text 3"/>
-          <p:cNvSpPr/>
-          <p:nvPr/>
-        </p:nvSpPr>
-        <p:spPr>
-          <a:xfrm>
-            <a:off x="406301" y="1266974"/>
-            <a:ext cx="8331398" cy="428476"/>
-          </a:xfrm>
-          <a:prstGeom prst="rect">
-            <a:avLst/>
-          </a:prstGeom>
-          <a:solidFill>
-            <a:srgbClr val="F4F8F9"/>
-          </a:solidFill>
-          <a:ln/>
-        </p:spPr>
-        <p:txBody>
-          <a:bodyPr wrap="square" rtlCol="0" anchor="ctr"/>
-          <a:lstStyle/>
-          <a:p>
-            <a:pPr indent="0" marL="0">
-              <a:buNone/>
-            </a:pPr>
-            <a:endParaRPr lang="en-US" dirty="0"/>
-          </a:p>
-        </p:txBody>
-      </p:sp>
-      <p:sp>
-        <p:nvSpPr>
-          <p:cNvPr id="6" name="Shape 4"/>
-          <p:cNvSpPr/>
-          <p:nvPr/>
-        </p:nvSpPr>
-        <p:spPr>
-          <a:xfrm>
-            <a:off x="430113" y="1266974"/>
-            <a:ext cx="0" cy="428476"/>
-          </a:xfrm>
-          <a:prstGeom prst="line">
-            <a:avLst/>
-          </a:prstGeom>
-          <a:noFill/>
-          <a:ln w="47625">
-            <a:solidFill>
-              <a:srgbClr val="277884"/>
-            </a:solidFill>
-            <a:prstDash val="solid"/>
-          </a:ln>
-        </p:spPr>
-      </p:sp>
-      <p:sp>
-        <p:nvSpPr>
-          <p:cNvPr id="7" name="Text 5"/>
-          <p:cNvSpPr/>
-          <p:nvPr/>
-        </p:nvSpPr>
-        <p:spPr>
-          <a:xfrm>
-            <a:off x="631627" y="1393924"/>
-            <a:ext cx="8086939" cy="174575"/>
-          </a:xfrm>
-          <a:prstGeom prst="rect">
-            <a:avLst/>
-          </a:prstGeom>
-          <a:noFill/>
-          <a:ln/>
-        </p:spPr>
-        <p:txBody>
-          <a:bodyPr wrap="square" lIns="0" tIns="0" rIns="0" bIns="0" rtlCol="0" anchor="t"/>
-          <a:lstStyle/>
-          <a:p>
-            <a:pPr algn="l" indent="0" marL="0">
-              <a:lnSpc>
-                <a:spcPts val="1375"/>
-              </a:lnSpc>
-              <a:buNone/>
-            </a:pPr>
-            <a:r>
-              <a:rPr lang="en-US" sz="1100" dirty="0">
-                <a:solidFill>
-                  <a:srgbClr val="1C2833"/>
-                </a:solidFill>
-                <a:latin typeface="Courier New" pitchFamily="34" charset="0"/>
-                <a:ea typeface="Courier New" pitchFamily="34" charset="-122"/>
-                <a:cs typeface="Courier New" pitchFamily="34" charset="-120"/>
-              </a:rPr>
-              <a:t>33 + 9 = ?</a:t>
-            </a:r>
-            <a:endParaRPr lang="en-US" sz="1100" dirty="0"/>
-          </a:p>
-        </p:txBody>
-      </p:sp>
-      <p:sp>
-        <p:nvSpPr>
-          <p:cNvPr id="8" name="Text 6"/>
-          <p:cNvSpPr/>
-          <p:nvPr/>
-        </p:nvSpPr>
-        <p:spPr>
-          <a:xfrm>
-            <a:off x="406301" y="1784300"/>
-            <a:ext cx="8498026" cy="213271"/>
-          </a:xfrm>
-          <a:prstGeom prst="rect">
-            <a:avLst/>
-          </a:prstGeom>
-          <a:noFill/>
-          <a:ln/>
-        </p:spPr>
-        <p:txBody>
-          <a:bodyPr wrap="square" lIns="0" tIns="0" rIns="0" bIns="0" rtlCol="0" anchor="t"/>
-          <a:lstStyle/>
-          <a:p>
-            <a:pPr algn="l" indent="0" marL="0">
-              <a:lnSpc>
-                <a:spcPts val="1680"/>
-              </a:lnSpc>
-              <a:spcBef>
-                <a:spcPts val="300"/>
-              </a:spcBef>
-              <a:spcAft>
-                <a:spcPts val="300"/>
-              </a:spcAft>
-              <a:buNone/>
+          <a:p>
+            <a:pPr algn="l" marL="342900" indent="-342900">
+              <a:lnSpc>
+                <a:spcPts val="1620"/>
+              </a:lnSpc>
+              <a:spcAft>
+                <a:spcPts val="300"/>
+              </a:spcAft>
+              <a:buSzPct val="100000"/>
+              <a:buChar char="•"/>
             </a:pPr>
             <a:r>
               <a:rPr lang="en-US" sz="1200" dirty="0">
@@ -3979,45 +6086,19 @@
                 <a:ea typeface="Arial" pitchFamily="34" charset="-122"/>
                 <a:cs typeface="Arial" pitchFamily="34" charset="-120"/>
               </a:rPr>
-              <a:t>Most students will scratch out 33+9 = 42 in their head, taking 2–3 seconds.</a:t>
-            </a:r>
-            <a:endParaRPr lang="en-US" sz="1200" dirty="0"/>
-          </a:p>
-        </p:txBody>
-      </p:sp>
-      <p:sp>
-        <p:nvSpPr>
-          <p:cNvPr id="9" name="Text 7"/>
-          <p:cNvSpPr/>
-          <p:nvPr/>
-        </p:nvSpPr>
-        <p:spPr>
-          <a:xfrm>
-            <a:off x="634901" y="2086421"/>
-            <a:ext cx="8102798" cy="281880"/>
-          </a:xfrm>
-          <a:prstGeom prst="rect">
-            <a:avLst/>
-          </a:prstGeom>
-          <a:noFill/>
-          <a:ln/>
-        </p:spPr>
-        <p:txBody>
-          <a:bodyPr wrap="square" lIns="0" tIns="0" rIns="0" bIns="0" rtlCol="0" anchor="t"/>
-          <a:lstStyle/>
-          <a:p>
-            <a:pPr algn="l" marL="342900" indent="-342900">
+              <a:t>Quick recall: </a:t>
+            </a:r>
+            <a:pPr algn="l" indent="0" marL="0">
               <a:lnSpc>
                 <a:spcPts val="1620"/>
               </a:lnSpc>
               <a:spcAft>
                 <a:spcPts val="300"/>
               </a:spcAft>
-              <a:buSzPct val="100000"/>
-              <a:buChar char="•"/>
-            </a:pPr>
-            <a:r>
-              <a:rPr lang="en-US" sz="1200" dirty="0">
+              <a:buNone/>
+            </a:pPr>
+            <a:r>
+              <a:rPr lang="en-US" sz="1200" i="1" dirty="0">
                 <a:solidFill>
                   <a:srgbClr val="1C2833"/>
                 </a:solidFill>
@@ -4025,177 +6106,12 @@
                 <a:ea typeface="Arial" pitchFamily="34" charset="-122"/>
                 <a:cs typeface="Arial" pitchFamily="34" charset="-120"/>
               </a:rPr>
-              <a:t>Show the trick:</a:t>
-            </a:r>
-            <a:endParaRPr lang="en-US" sz="1200" dirty="0"/>
-          </a:p>
-        </p:txBody>
-      </p:sp>
-      <p:sp>
-        <p:nvSpPr>
-          <p:cNvPr id="10" name="Text 8"/>
-          <p:cNvSpPr/>
-          <p:nvPr/>
-        </p:nvSpPr>
-        <p:spPr>
-          <a:xfrm>
-            <a:off x="406301" y="2469803"/>
-            <a:ext cx="8331398" cy="603052"/>
-          </a:xfrm>
-          <a:prstGeom prst="rect">
-            <a:avLst/>
-          </a:prstGeom>
-          <a:solidFill>
-            <a:srgbClr val="F4F8F9"/>
-          </a:solidFill>
-          <a:ln/>
-        </p:spPr>
-        <p:txBody>
-          <a:bodyPr wrap="square" rtlCol="0" anchor="ctr"/>
-          <a:lstStyle/>
-          <a:p>
-            <a:pPr indent="0" marL="0">
-              <a:buNone/>
-            </a:pPr>
-            <a:endParaRPr lang="en-US" dirty="0"/>
-          </a:p>
-        </p:txBody>
-      </p:sp>
-      <p:sp>
-        <p:nvSpPr>
-          <p:cNvPr id="11" name="Shape 9"/>
-          <p:cNvSpPr/>
-          <p:nvPr/>
-        </p:nvSpPr>
-        <p:spPr>
-          <a:xfrm>
-            <a:off x="430113" y="2469803"/>
-            <a:ext cx="0" cy="603052"/>
-          </a:xfrm>
-          <a:prstGeom prst="line">
-            <a:avLst/>
-          </a:prstGeom>
-          <a:noFill/>
-          <a:ln w="47625">
-            <a:solidFill>
-              <a:srgbClr val="277884"/>
-            </a:solidFill>
-            <a:prstDash val="solid"/>
-          </a:ln>
-        </p:spPr>
-      </p:sp>
-      <p:sp>
-        <p:nvSpPr>
-          <p:cNvPr id="12" name="Text 10"/>
-          <p:cNvSpPr/>
-          <p:nvPr/>
-        </p:nvSpPr>
-        <p:spPr>
-          <a:xfrm>
-            <a:off x="631627" y="2596753"/>
-            <a:ext cx="8086939" cy="174575"/>
-          </a:xfrm>
-          <a:prstGeom prst="rect">
-            <a:avLst/>
-          </a:prstGeom>
-          <a:noFill/>
-          <a:ln/>
-        </p:spPr>
-        <p:txBody>
-          <a:bodyPr wrap="square" lIns="0" tIns="0" rIns="0" bIns="0" rtlCol="0" anchor="t"/>
-          <a:lstStyle/>
-          <a:p>
-            <a:pPr algn="l" indent="0" marL="0">
-              <a:lnSpc>
-                <a:spcPts val="1375"/>
-              </a:lnSpc>
-              <a:buNone/>
-            </a:pPr>
-            <a:r>
-              <a:rPr lang="en-US" sz="1100" dirty="0">
-                <a:solidFill>
-                  <a:srgbClr val="1C2833"/>
-                </a:solidFill>
-                <a:latin typeface="Courier New" pitchFamily="34" charset="0"/>
-                <a:ea typeface="Courier New" pitchFamily="34" charset="-122"/>
-                <a:cs typeface="Courier New" pitchFamily="34" charset="-120"/>
-              </a:rPr>
-              <a:t>9 = 10 − 1</a:t>
-            </a:r>
-            <a:endParaRPr lang="en-US" sz="1100" dirty="0"/>
-          </a:p>
-        </p:txBody>
-      </p:sp>
-      <p:sp>
-        <p:nvSpPr>
-          <p:cNvPr id="13" name="Text 11"/>
-          <p:cNvSpPr/>
-          <p:nvPr/>
-        </p:nvSpPr>
-        <p:spPr>
-          <a:xfrm>
-            <a:off x="631627" y="2771329"/>
-            <a:ext cx="8086939" cy="174575"/>
-          </a:xfrm>
-          <a:prstGeom prst="rect">
-            <a:avLst/>
-          </a:prstGeom>
-          <a:noFill/>
-          <a:ln/>
-        </p:spPr>
-        <p:txBody>
-          <a:bodyPr wrap="square" lIns="0" tIns="0" rIns="0" bIns="0" rtlCol="0" anchor="t"/>
-          <a:lstStyle/>
-          <a:p>
-            <a:pPr algn="l" indent="0" marL="0">
-              <a:lnSpc>
-                <a:spcPts val="1375"/>
-              </a:lnSpc>
-              <a:buNone/>
-            </a:pPr>
-            <a:r>
-              <a:rPr lang="en-US" sz="1100" dirty="0">
-                <a:solidFill>
-                  <a:srgbClr val="1C2833"/>
-                </a:solidFill>
-                <a:latin typeface="Courier New" pitchFamily="34" charset="0"/>
-                <a:ea typeface="Courier New" pitchFamily="34" charset="-122"/>
-                <a:cs typeface="Courier New" pitchFamily="34" charset="-120"/>
-              </a:rPr>
-              <a:t>So 33 + 9 = 33 + 10 − 1 = 43 − 1 = 42</a:t>
-            </a:r>
-            <a:endParaRPr lang="en-US" sz="1100" dirty="0"/>
-          </a:p>
-        </p:txBody>
-      </p:sp>
-      <p:sp>
-        <p:nvSpPr>
-          <p:cNvPr id="14" name="Text 12"/>
-          <p:cNvSpPr/>
-          <p:nvPr/>
-        </p:nvSpPr>
-        <p:spPr>
-          <a:xfrm>
-            <a:off x="406301" y="3161705"/>
-            <a:ext cx="8498026" cy="213271"/>
-          </a:xfrm>
-          <a:prstGeom prst="rect">
-            <a:avLst/>
-          </a:prstGeom>
-          <a:noFill/>
-          <a:ln/>
-        </p:spPr>
-        <p:txBody>
-          <a:bodyPr wrap="square" lIns="0" tIns="0" rIns="0" bIns="0" rtlCol="0" anchor="t"/>
-          <a:lstStyle/>
-          <a:p>
-            <a:pPr algn="l" indent="0" marL="0">
-              <a:lnSpc>
-                <a:spcPts val="1680"/>
-              </a:lnSpc>
-              <a:spcBef>
-                <a:spcPts val="300"/>
-              </a:spcBef>
+              <a:t>"In yesterday's writing, what was the most surprising place where you 'complete to 10' without thinking?"</a:t>
+            </a:r>
+            <a:pPr algn="l" indent="0" marL="0">
+              <a:lnSpc>
+                <a:spcPts val="1620"/>
+              </a:lnSpc>
               <a:spcAft>
                 <a:spcPts val="300"/>
               </a:spcAft>
@@ -4210,53 +6126,7 @@
                 <a:ea typeface="Arial" pitchFamily="34" charset="-122"/>
                 <a:cs typeface="Arial" pitchFamily="34" charset="-120"/>
               </a:rPr>
-              <a:t>Now do it in your head: </a:t>
-            </a:r>
-            <a:pPr algn="l" indent="0" marL="0">
-              <a:lnSpc>
-                <a:spcPts val="1680"/>
-              </a:lnSpc>
-              <a:spcBef>
-                <a:spcPts val="300"/>
-              </a:spcBef>
-              <a:spcAft>
-                <a:spcPts val="300"/>
-              </a:spcAft>
-              <a:buNone/>
-            </a:pPr>
-            <a:r>
-              <a:rPr lang="en-US" sz="1200" b="1" dirty="0">
-                <a:solidFill>
-                  <a:srgbClr val="1C2833"/>
-                </a:solidFill>
-                <a:latin typeface="Arial" pitchFamily="34" charset="0"/>
-                <a:ea typeface="Arial" pitchFamily="34" charset="-122"/>
-                <a:cs typeface="Arial" pitchFamily="34" charset="-120"/>
-              </a:rPr>
-              <a:t>add 10, subtract 1</a:t>
-            </a:r>
-            <a:pPr algn="l" indent="0" marL="0">
-              <a:lnSpc>
-                <a:spcPts val="1680"/>
-              </a:lnSpc>
-              <a:spcBef>
-                <a:spcPts val="300"/>
-              </a:spcBef>
-              <a:spcAft>
-                <a:spcPts val="300"/>
-              </a:spcAft>
-              <a:buNone/>
-            </a:pPr>
-            <a:r>
-              <a:rPr lang="en-US" sz="1200" dirty="0">
-                <a:solidFill>
-                  <a:srgbClr val="1C2833"/>
-                </a:solidFill>
-                <a:latin typeface="Arial" pitchFamily="34" charset="0"/>
-                <a:ea typeface="Arial" pitchFamily="34" charset="-122"/>
-                <a:cs typeface="Arial" pitchFamily="34" charset="-120"/>
-              </a:rPr>
-              <a:t>. ~0.5 seconds.</a:t>
+              <a:t> — 2 student shares.</a:t>
             </a:r>
             <a:endParaRPr lang="en-US" sz="1200" dirty="0"/>
           </a:p>
@@ -4264,307 +6134,13 @@
       </p:sp>
       <p:sp>
         <p:nvSpPr>
-          <p:cNvPr id="15" name="Text 13"/>
-          <p:cNvSpPr/>
-          <p:nvPr/>
-        </p:nvSpPr>
-        <p:spPr>
-          <a:xfrm>
-            <a:off x="634901" y="3463826"/>
-            <a:ext cx="8102798" cy="281880"/>
-          </a:xfrm>
-          <a:prstGeom prst="rect">
-            <a:avLst/>
-          </a:prstGeom>
-          <a:noFill/>
-          <a:ln/>
-        </p:spPr>
-        <p:txBody>
-          <a:bodyPr wrap="square" lIns="0" tIns="0" rIns="0" bIns="0" rtlCol="0" anchor="t"/>
-          <a:lstStyle/>
-          <a:p>
-            <a:pPr algn="l" marL="342900" indent="-342900">
-              <a:lnSpc>
-                <a:spcPts val="1620"/>
-              </a:lnSpc>
-              <a:spcAft>
-                <a:spcPts val="300"/>
-              </a:spcAft>
-              <a:buSzPct val="100000"/>
-              <a:buChar char="•"/>
-            </a:pPr>
-            <a:r>
-              <a:rPr lang="en-US" sz="1200" b="1" dirty="0">
-                <a:solidFill>
-                  <a:srgbClr val="1C2833"/>
-                </a:solidFill>
-                <a:latin typeface="Arial" pitchFamily="34" charset="0"/>
-                <a:ea typeface="Arial" pitchFamily="34" charset="-122"/>
-                <a:cs typeface="Arial" pitchFamily="34" charset="-120"/>
-              </a:rPr>
-              <a:t>The general pattern (write on board):</a:t>
-            </a:r>
-            <a:endParaRPr lang="en-US" sz="1200" dirty="0"/>
-          </a:p>
-        </p:txBody>
-      </p:sp>
-      <p:sp>
-        <p:nvSpPr>
-          <p:cNvPr id="16" name="Text 14"/>
-          <p:cNvSpPr/>
-          <p:nvPr/>
-        </p:nvSpPr>
-        <p:spPr>
-          <a:xfrm>
-            <a:off x="406301" y="3834557"/>
-            <a:ext cx="8498026" cy="426541"/>
-          </a:xfrm>
-          <a:prstGeom prst="rect">
-            <a:avLst/>
-          </a:prstGeom>
-          <a:noFill/>
-          <a:ln/>
-        </p:spPr>
-        <p:txBody>
-          <a:bodyPr wrap="square" lIns="0" tIns="0" rIns="0" bIns="0" rtlCol="0" anchor="t"/>
-          <a:lstStyle/>
-          <a:p>
-            <a:pPr algn="l" indent="0" marL="0">
-              <a:lnSpc>
-                <a:spcPts val="1680"/>
-              </a:lnSpc>
-              <a:spcBef>
-                <a:spcPts val="300"/>
-              </a:spcBef>
-              <a:spcAft>
-                <a:spcPts val="300"/>
-              </a:spcAft>
-              <a:buNone/>
-            </a:pPr>
-            <a:r>
-              <a:rPr lang="en-US" sz="1200" dirty="0">
-                <a:solidFill>
-                  <a:srgbClr val="1C2833"/>
-                </a:solidFill>
-                <a:latin typeface="Arial" pitchFamily="34" charset="0"/>
-                <a:ea typeface="Arial" pitchFamily="34" charset="-122"/>
-                <a:cs typeface="Arial" pitchFamily="34" charset="-120"/>
-              </a:rPr>
-              <a:t>&gt; To add a number that ends in 9, 8, 7 (close to a multiple of 10):    &gt; 1. ROUND UP to the multiple of 10.    &gt; 2. ADD that.    &gt; 3. SUBTRACT the deficiency.</a:t>
-            </a:r>
-            <a:endParaRPr lang="en-US" sz="1200" dirty="0"/>
-          </a:p>
-        </p:txBody>
-      </p:sp>
-      <p:sp>
-        <p:nvSpPr>
-          <p:cNvPr id="17" name="Text 15"/>
-          <p:cNvSpPr/>
-          <p:nvPr/>
-        </p:nvSpPr>
-        <p:spPr>
-          <a:xfrm>
-            <a:off x="634901" y="4349948"/>
-            <a:ext cx="8102798" cy="281880"/>
-          </a:xfrm>
-          <a:prstGeom prst="rect">
-            <a:avLst/>
-          </a:prstGeom>
-          <a:noFill/>
-          <a:ln/>
-        </p:spPr>
-        <p:txBody>
-          <a:bodyPr wrap="square" lIns="0" tIns="0" rIns="0" bIns="0" rtlCol="0" anchor="t"/>
-          <a:lstStyle/>
-          <a:p>
-            <a:pPr algn="l" marL="342900" indent="-342900">
-              <a:lnSpc>
-                <a:spcPts val="1620"/>
-              </a:lnSpc>
-              <a:spcAft>
-                <a:spcPts val="300"/>
-              </a:spcAft>
-              <a:buSzPct val="100000"/>
-              <a:buChar char="•"/>
-            </a:pPr>
-            <a:r>
-              <a:rPr lang="en-US" sz="1200" dirty="0">
-                <a:solidFill>
-                  <a:srgbClr val="1C2833"/>
-                </a:solidFill>
-                <a:latin typeface="Arial" pitchFamily="34" charset="0"/>
-                <a:ea typeface="Arial" pitchFamily="34" charset="-122"/>
-                <a:cs typeface="Arial" pitchFamily="34" charset="-120"/>
-              </a:rPr>
-              <a:t>Worked examples (class chorus):</a:t>
-            </a:r>
-            <a:endParaRPr lang="en-US" sz="1200" dirty="0"/>
-          </a:p>
-        </p:txBody>
-      </p:sp>
-      <p:sp>
-        <p:nvSpPr>
-          <p:cNvPr id="18" name="Text 16"/>
-          <p:cNvSpPr/>
-          <p:nvPr/>
-        </p:nvSpPr>
-        <p:spPr>
-          <a:xfrm>
-            <a:off x="406301" y="4720679"/>
-            <a:ext cx="8498026" cy="426541"/>
-          </a:xfrm>
-          <a:prstGeom prst="rect">
-            <a:avLst/>
-          </a:prstGeom>
-          <a:noFill/>
-          <a:ln/>
-        </p:spPr>
-        <p:txBody>
-          <a:bodyPr wrap="square" lIns="0" tIns="0" rIns="0" bIns="0" rtlCol="0" anchor="t"/>
-          <a:lstStyle/>
-          <a:p>
-            <a:pPr algn="l" indent="0" marL="0">
-              <a:lnSpc>
-                <a:spcPts val="1680"/>
-              </a:lnSpc>
-              <a:spcBef>
-                <a:spcPts val="300"/>
-              </a:spcBef>
-              <a:spcAft>
-                <a:spcPts val="300"/>
-              </a:spcAft>
-              <a:buNone/>
-            </a:pPr>
-            <a:r>
-              <a:rPr lang="en-US" sz="1200" dirty="0">
-                <a:solidFill>
-                  <a:srgbClr val="1C2833"/>
-                </a:solidFill>
-                <a:latin typeface="Arial" pitchFamily="34" charset="0"/>
-                <a:ea typeface="Arial" pitchFamily="34" charset="-122"/>
-                <a:cs typeface="Arial" pitchFamily="34" charset="-120"/>
-              </a:rPr>
-              <a:t>– 47 + 9 = 47 + 10 − 1 = 56    – 28 + 19 = 28 + 20 − 1 = 47    – 64 + 29 = 64 + 30 − 1 = 93    – 55 + 48 = 55 + 50 − 2 = 103    – 36 + 38 = 36 + 40 − 2 = 74</a:t>
-            </a:r>
-            <a:endParaRPr lang="en-US" sz="1200" dirty="0"/>
-          </a:p>
-        </p:txBody>
-      </p:sp>
-      <p:sp>
-        <p:nvSpPr>
-          <p:cNvPr id="19" name="Text 17"/>
-          <p:cNvSpPr/>
-          <p:nvPr/>
-        </p:nvSpPr>
-        <p:spPr>
-          <a:xfrm>
-            <a:off x="634901" y="5236071"/>
-            <a:ext cx="8102798" cy="487561"/>
-          </a:xfrm>
-          <a:prstGeom prst="rect">
-            <a:avLst/>
-          </a:prstGeom>
-          <a:noFill/>
-          <a:ln/>
-        </p:spPr>
-        <p:txBody>
-          <a:bodyPr wrap="square" lIns="0" tIns="0" rIns="0" bIns="0" rtlCol="0" anchor="t"/>
-          <a:lstStyle/>
-          <a:p>
-            <a:pPr algn="l" marL="342900" indent="-342900">
-              <a:lnSpc>
-                <a:spcPts val="1620"/>
-              </a:lnSpc>
-              <a:spcAft>
-                <a:spcPts val="300"/>
-              </a:spcAft>
-              <a:buSzPct val="100000"/>
-              <a:buChar char="•"/>
-            </a:pPr>
-            <a:r>
-              <a:rPr lang="en-US" sz="1200" b="1" dirty="0">
-                <a:solidFill>
-                  <a:srgbClr val="1C2833"/>
-                </a:solidFill>
-                <a:latin typeface="Arial" pitchFamily="34" charset="0"/>
-                <a:ea typeface="Arial" pitchFamily="34" charset="-122"/>
-                <a:cs typeface="Arial" pitchFamily="34" charset="-120"/>
-              </a:rPr>
-              <a:t>Why?</a:t>
-            </a:r>
-            <a:pPr algn="l" indent="0" marL="0">
-              <a:lnSpc>
-                <a:spcPts val="1620"/>
-              </a:lnSpc>
-              <a:spcAft>
-                <a:spcPts val="300"/>
-              </a:spcAft>
-              <a:buNone/>
-            </a:pPr>
-            <a:r>
-              <a:rPr lang="en-US" sz="1200" dirty="0">
-                <a:solidFill>
-                  <a:srgbClr val="1C2833"/>
-                </a:solidFill>
-                <a:latin typeface="Arial" pitchFamily="34" charset="0"/>
-                <a:ea typeface="Arial" pitchFamily="34" charset="-122"/>
-                <a:cs typeface="Arial" pitchFamily="34" charset="-120"/>
-              </a:rPr>
-              <a:t> Same "completion to a base" idea — and now the base can be 10, 20, 30, 100. This is exactly Tirthaji's sūtra #7 (</a:t>
-            </a:r>
-            <a:pPr algn="l" indent="0" marL="0">
-              <a:lnSpc>
-                <a:spcPts val="1620"/>
-              </a:lnSpc>
-              <a:spcAft>
-                <a:spcPts val="300"/>
-              </a:spcAft>
-              <a:buNone/>
-            </a:pPr>
-            <a:r>
-              <a:rPr lang="en-US" sz="1200" i="1" dirty="0">
-                <a:solidFill>
-                  <a:srgbClr val="1C2833"/>
-                </a:solidFill>
-                <a:latin typeface="Arial" pitchFamily="34" charset="0"/>
-                <a:ea typeface="Arial" pitchFamily="34" charset="-122"/>
-                <a:cs typeface="Arial" pitchFamily="34" charset="-120"/>
-              </a:rPr>
-              <a:t>Sankalana Vyavakalanābhyām</a:t>
-            </a:r>
-            <a:pPr algn="l" indent="0" marL="0">
-              <a:lnSpc>
-                <a:spcPts val="1620"/>
-              </a:lnSpc>
-              <a:spcAft>
-                <a:spcPts val="300"/>
-              </a:spcAft>
-              <a:buNone/>
-            </a:pPr>
-            <a:r>
-              <a:rPr lang="en-US" sz="1200" dirty="0">
-                <a:solidFill>
-                  <a:srgbClr val="1C2833"/>
-                </a:solidFill>
-                <a:latin typeface="Arial" pitchFamily="34" charset="0"/>
-                <a:ea typeface="Arial" pitchFamily="34" charset="-122"/>
-                <a:cs typeface="Arial" pitchFamily="34" charset="-120"/>
-              </a:rPr>
-              <a:t> — "by addition and by subtraction"). Write the name on the board.</a:t>
-            </a:r>
-            <a:endParaRPr lang="en-US" sz="1200" dirty="0"/>
-          </a:p>
-        </p:txBody>
-      </p:sp>
-      <p:sp>
-        <p:nvSpPr>
-          <p:cNvPr id="20" name="Text 18"/>
-          <p:cNvSpPr/>
-          <p:nvPr/>
-        </p:nvSpPr>
-        <p:spPr>
-          <a:xfrm>
-            <a:off x="406301" y="5888682"/>
+          <p:cNvPr id="5" name="Text 3"/>
+          <p:cNvSpPr/>
+          <p:nvPr/>
+        </p:nvSpPr>
+        <p:spPr>
+          <a:xfrm>
+            <a:off x="406301" y="4434929"/>
             <a:ext cx="8498026" cy="213271"/>
           </a:xfrm>
           <a:prstGeom prst="rect">
@@ -4708,7 +6284,7 @@
                 <a:ea typeface="Georgia" pitchFamily="34" charset="-122"/>
                 <a:cs typeface="Georgia" pitchFamily="34" charset="-120"/>
               </a:rPr>
-              <a:t>Activity (20 min) — Near-base drills</a:t>
+              <a:t>Core (15 min) — The "near-base" pattern</a:t>
             </a:r>
             <a:endParaRPr lang="en-US" sz="1800" dirty="0"/>
           </a:p>
@@ -4722,8 +6298,8 @@
         </p:nvSpPr>
         <p:spPr>
           <a:xfrm>
-            <a:off x="406301" y="870942"/>
-            <a:ext cx="8498026" cy="222796"/>
+            <a:off x="634901" y="883593"/>
+            <a:ext cx="8102798" cy="281880"/>
           </a:xfrm>
           <a:prstGeom prst="rect">
             <a:avLst/>
@@ -4735,17 +6311,15 @@
           <a:bodyPr wrap="square" lIns="0" tIns="0" rIns="0" bIns="0" rtlCol="0" anchor="t"/>
           <a:lstStyle/>
           <a:p>
-            <a:pPr algn="l" indent="0" marL="0">
-              <a:lnSpc>
-                <a:spcPts val="1680"/>
-              </a:lnSpc>
-              <a:spcBef>
-                <a:spcPts val="300"/>
-              </a:spcBef>
-              <a:spcAft>
-                <a:spcPts val="300"/>
-              </a:spcAft>
-              <a:buNone/>
+            <a:pPr algn="l" marL="342900" indent="-342900">
+              <a:lnSpc>
+                <a:spcPts val="1620"/>
+              </a:lnSpc>
+              <a:spcAft>
+                <a:spcPts val="300"/>
+              </a:spcAft>
+              <a:buSzPct val="100000"/>
+              <a:buChar char="•"/>
             </a:pPr>
             <a:r>
               <a:rPr lang="en-US" sz="1200" dirty="0">
@@ -4756,8 +6330,128 @@
                 <a:ea typeface="Arial" pitchFamily="34" charset="-122"/>
                 <a:cs typeface="Arial" pitchFamily="34" charset="-120"/>
               </a:rPr>
-              <a:t>Follow </a:t>
-            </a:r>
+              <a:t>Write on board:</a:t>
+            </a:r>
+            <a:endParaRPr lang="en-US" sz="1200" dirty="0"/>
+          </a:p>
+        </p:txBody>
+      </p:sp>
+      <p:sp>
+        <p:nvSpPr>
+          <p:cNvPr id="5" name="Text 3"/>
+          <p:cNvSpPr/>
+          <p:nvPr/>
+        </p:nvSpPr>
+        <p:spPr>
+          <a:xfrm>
+            <a:off x="406301" y="1266974"/>
+            <a:ext cx="8331398" cy="428476"/>
+          </a:xfrm>
+          <a:prstGeom prst="rect">
+            <a:avLst/>
+          </a:prstGeom>
+          <a:solidFill>
+            <a:srgbClr val="F4F8F9"/>
+          </a:solidFill>
+          <a:ln/>
+        </p:spPr>
+        <p:txBody>
+          <a:bodyPr wrap="square" rtlCol="0" anchor="ctr"/>
+          <a:lstStyle/>
+          <a:p>
+            <a:pPr indent="0" marL="0">
+              <a:buNone/>
+            </a:pPr>
+            <a:endParaRPr lang="en-US" dirty="0"/>
+          </a:p>
+        </p:txBody>
+      </p:sp>
+      <p:sp>
+        <p:nvSpPr>
+          <p:cNvPr id="6" name="Shape 4"/>
+          <p:cNvSpPr/>
+          <p:nvPr/>
+        </p:nvSpPr>
+        <p:spPr>
+          <a:xfrm>
+            <a:off x="430113" y="1266974"/>
+            <a:ext cx="0" cy="428476"/>
+          </a:xfrm>
+          <a:prstGeom prst="line">
+            <a:avLst/>
+          </a:prstGeom>
+          <a:noFill/>
+          <a:ln w="47625">
+            <a:solidFill>
+              <a:srgbClr val="277884"/>
+            </a:solidFill>
+            <a:prstDash val="solid"/>
+          </a:ln>
+        </p:spPr>
+      </p:sp>
+      <p:sp>
+        <p:nvSpPr>
+          <p:cNvPr id="7" name="Text 5"/>
+          <p:cNvSpPr/>
+          <p:nvPr/>
+        </p:nvSpPr>
+        <p:spPr>
+          <a:xfrm>
+            <a:off x="631627" y="1393924"/>
+            <a:ext cx="8086939" cy="174575"/>
+          </a:xfrm>
+          <a:prstGeom prst="rect">
+            <a:avLst/>
+          </a:prstGeom>
+          <a:noFill/>
+          <a:ln/>
+        </p:spPr>
+        <p:txBody>
+          <a:bodyPr wrap="square" lIns="0" tIns="0" rIns="0" bIns="0" rtlCol="0" anchor="t"/>
+          <a:lstStyle/>
+          <a:p>
+            <a:pPr algn="l" indent="0" marL="0">
+              <a:lnSpc>
+                <a:spcPts val="1375"/>
+              </a:lnSpc>
+              <a:buNone/>
+            </a:pPr>
+            <a:r>
+              <a:rPr lang="en-US" sz="1100" dirty="0">
+                <a:solidFill>
+                  <a:srgbClr val="1C2833"/>
+                </a:solidFill>
+                <a:latin typeface="Courier New" pitchFamily="34" charset="0"/>
+                <a:ea typeface="Courier New" pitchFamily="34" charset="-122"/>
+                <a:cs typeface="Courier New" pitchFamily="34" charset="-120"/>
+              </a:rPr>
+              <a:t>33 + 9 = ?</a:t>
+            </a:r>
+            <a:endParaRPr lang="en-US" sz="1100" dirty="0"/>
+          </a:p>
+        </p:txBody>
+      </p:sp>
+      <p:sp>
+        <p:nvSpPr>
+          <p:cNvPr id="8" name="Text 6"/>
+          <p:cNvSpPr/>
+          <p:nvPr/>
+        </p:nvSpPr>
+        <p:spPr>
+          <a:xfrm>
+            <a:off x="406301" y="1784300"/>
+            <a:ext cx="8498026" cy="213271"/>
+          </a:xfrm>
+          <a:prstGeom prst="rect">
+            <a:avLst/>
+          </a:prstGeom>
+          <a:noFill/>
+          <a:ln/>
+        </p:spPr>
+        <p:txBody>
+          <a:bodyPr wrap="square" lIns="0" tIns="0" rIns="0" bIns="0" rtlCol="0" anchor="t"/>
+          <a:lstStyle/>
+          <a:p>
             <a:pPr algn="l" indent="0" marL="0">
               <a:lnSpc>
                 <a:spcPts val="1680"/>
@@ -4779,30 +6473,7 @@
                 <a:ea typeface="Arial" pitchFamily="34" charset="-122"/>
                 <a:cs typeface="Arial" pitchFamily="34" charset="-120"/>
               </a:rPr>
-              <a:t>activities/activity-02-near-base.md</a:t>
-            </a:r>
-            <a:pPr algn="l" indent="0" marL="0">
-              <a:lnSpc>
-                <a:spcPts val="1680"/>
-              </a:lnSpc>
-              <a:spcBef>
-                <a:spcPts val="300"/>
-              </a:spcBef>
-              <a:spcAft>
-                <a:spcPts val="300"/>
-              </a:spcAft>
-              <a:buNone/>
-            </a:pPr>
-            <a:r>
-              <a:rPr lang="en-US" sz="1200" dirty="0">
-                <a:solidFill>
-                  <a:srgbClr val="1C2833"/>
-                </a:solidFill>
-                <a:latin typeface="Arial" pitchFamily="34" charset="0"/>
-                <a:ea typeface="Arial" pitchFamily="34" charset="-122"/>
-                <a:cs typeface="Arial" pitchFamily="34" charset="-120"/>
-              </a:rPr>
-              <a:t>. Brief:</a:t>
+              <a:t>Most students will scratch out 33+9 = 42 in their head, taking 2–3 seconds.</a:t>
             </a:r>
             <a:endParaRPr lang="en-US" sz="1200" dirty="0"/>
           </a:p>
@@ -4810,55 +6481,7 @@
       </p:sp>
       <p:sp>
         <p:nvSpPr>
-          <p:cNvPr id="5" name="Text 3"/>
-          <p:cNvSpPr/>
-          <p:nvPr/>
-        </p:nvSpPr>
-        <p:spPr>
-          <a:xfrm>
-            <a:off x="406301" y="1169938"/>
-            <a:ext cx="8498026" cy="853083"/>
-          </a:xfrm>
-          <a:prstGeom prst="rect">
-            <a:avLst/>
-          </a:prstGeom>
-          <a:noFill/>
-          <a:ln/>
-        </p:spPr>
-        <p:txBody>
-          <a:bodyPr wrap="square" lIns="0" tIns="0" rIns="0" bIns="0" rtlCol="0" anchor="t"/>
-          <a:lstStyle/>
-          <a:p>
-            <a:pPr algn="l" indent="0" marL="0">
-              <a:lnSpc>
-                <a:spcPts val="1680"/>
-              </a:lnSpc>
-              <a:spcBef>
-                <a:spcPts val="300"/>
-              </a:spcBef>
-              <a:spcAft>
-                <a:spcPts val="300"/>
-              </a:spcAft>
-              <a:buNone/>
-            </a:pPr>
-            <a:r>
-              <a:rPr lang="en-US" sz="1200" dirty="0">
-                <a:solidFill>
-                  <a:srgbClr val="1C2833"/>
-                </a:solidFill>
-                <a:latin typeface="Arial" pitchFamily="34" charset="0"/>
-                <a:ea typeface="Arial" pitchFamily="34" charset="-122"/>
-                <a:cs typeface="Arial" pitchFamily="34" charset="-120"/>
-              </a:rPr>
-              <a:t>– 5 min individual: 20 problems on a sheet, do as many as you can. – 5 min paired: partner-A reads a problem aloud, partner-B answers mentally in &lt;3 seconds, swap. – 5 min mixed: 10 problems on the board; class shouts answer in chorus. – 5 min quick-fire: teacher calls a 2-digit number ending in 9 or 8, then any other 2-digit number; students whisper-answer to their neighbour.</a:t>
-            </a:r>
-            <a:endParaRPr lang="en-US" sz="1200" dirty="0"/>
-          </a:p>
-        </p:txBody>
-      </p:sp>
-      <p:sp>
-        <p:nvSpPr>
-          <p:cNvPr id="6" name="Text 4"/>
+          <p:cNvPr id="9" name="Text 7"/>
           <p:cNvSpPr/>
           <p:nvPr/>
         </p:nvSpPr>
@@ -5008,7 +6631,7 @@
                 <a:ea typeface="Georgia" pitchFamily="34" charset="-122"/>
                 <a:cs typeface="Georgia" pitchFamily="34" charset="-120"/>
               </a:rPr>
-              <a:t>Wrap-up (5 min)</a:t>
+              <a:t>Core (15 min) — The "near-base" pattern (cont.)</a:t>
             </a:r>
             <a:endParaRPr lang="en-US" sz="1800" dirty="0"/>
           </a:p>
@@ -5022,8 +6645,8 @@
         </p:nvSpPr>
         <p:spPr>
           <a:xfrm>
-            <a:off x="406301" y="870942"/>
-            <a:ext cx="8498026" cy="436066"/>
+            <a:off x="634901" y="883593"/>
+            <a:ext cx="8102798" cy="281880"/>
           </a:xfrm>
           <a:prstGeom prst="rect">
             <a:avLst/>
@@ -5035,17 +6658,15 @@
           <a:bodyPr wrap="square" lIns="0" tIns="0" rIns="0" bIns="0" rtlCol="0" anchor="t"/>
           <a:lstStyle/>
           <a:p>
-            <a:pPr algn="l" indent="0" marL="0">
-              <a:lnSpc>
-                <a:spcPts val="1680"/>
-              </a:lnSpc>
-              <a:spcBef>
-                <a:spcPts val="300"/>
-              </a:spcBef>
-              <a:spcAft>
-                <a:spcPts val="300"/>
-              </a:spcAft>
-              <a:buNone/>
+            <a:pPr algn="l" marL="342900" indent="-342900">
+              <a:lnSpc>
+                <a:spcPts val="1620"/>
+              </a:lnSpc>
+              <a:spcAft>
+                <a:spcPts val="300"/>
+              </a:spcAft>
+              <a:buSzPct val="100000"/>
+              <a:buChar char="•"/>
             </a:pPr>
             <a:r>
               <a:rPr lang="en-US" sz="1200" dirty="0">
@@ -5056,8 +6677,170 @@
                 <a:ea typeface="Arial" pitchFamily="34" charset="-122"/>
                 <a:cs typeface="Arial" pitchFamily="34" charset="-120"/>
               </a:rPr>
-              <a:t>– Show of hands: who can now add </a:t>
-            </a:r>
+              <a:t>Show the trick:</a:t>
+            </a:r>
+            <a:endParaRPr lang="en-US" sz="1200" dirty="0"/>
+          </a:p>
+        </p:txBody>
+      </p:sp>
+      <p:sp>
+        <p:nvSpPr>
+          <p:cNvPr id="5" name="Text 3"/>
+          <p:cNvSpPr/>
+          <p:nvPr/>
+        </p:nvSpPr>
+        <p:spPr>
+          <a:xfrm>
+            <a:off x="406301" y="1266974"/>
+            <a:ext cx="8331398" cy="603052"/>
+          </a:xfrm>
+          <a:prstGeom prst="rect">
+            <a:avLst/>
+          </a:prstGeom>
+          <a:solidFill>
+            <a:srgbClr val="F4F8F9"/>
+          </a:solidFill>
+          <a:ln/>
+        </p:spPr>
+        <p:txBody>
+          <a:bodyPr wrap="square" rtlCol="0" anchor="ctr"/>
+          <a:lstStyle/>
+          <a:p>
+            <a:pPr indent="0" marL="0">
+              <a:buNone/>
+            </a:pPr>
+            <a:endParaRPr lang="en-US" dirty="0"/>
+          </a:p>
+        </p:txBody>
+      </p:sp>
+      <p:sp>
+        <p:nvSpPr>
+          <p:cNvPr id="6" name="Shape 4"/>
+          <p:cNvSpPr/>
+          <p:nvPr/>
+        </p:nvSpPr>
+        <p:spPr>
+          <a:xfrm>
+            <a:off x="430113" y="1266974"/>
+            <a:ext cx="0" cy="603052"/>
+          </a:xfrm>
+          <a:prstGeom prst="line">
+            <a:avLst/>
+          </a:prstGeom>
+          <a:noFill/>
+          <a:ln w="47625">
+            <a:solidFill>
+              <a:srgbClr val="277884"/>
+            </a:solidFill>
+            <a:prstDash val="solid"/>
+          </a:ln>
+        </p:spPr>
+      </p:sp>
+      <p:sp>
+        <p:nvSpPr>
+          <p:cNvPr id="7" name="Text 5"/>
+          <p:cNvSpPr/>
+          <p:nvPr/>
+        </p:nvSpPr>
+        <p:spPr>
+          <a:xfrm>
+            <a:off x="631627" y="1393924"/>
+            <a:ext cx="8086939" cy="174575"/>
+          </a:xfrm>
+          <a:prstGeom prst="rect">
+            <a:avLst/>
+          </a:prstGeom>
+          <a:noFill/>
+          <a:ln/>
+        </p:spPr>
+        <p:txBody>
+          <a:bodyPr wrap="square" lIns="0" tIns="0" rIns="0" bIns="0" rtlCol="0" anchor="t"/>
+          <a:lstStyle/>
+          <a:p>
+            <a:pPr algn="l" indent="0" marL="0">
+              <a:lnSpc>
+                <a:spcPts val="1375"/>
+              </a:lnSpc>
+              <a:buNone/>
+            </a:pPr>
+            <a:r>
+              <a:rPr lang="en-US" sz="1100" dirty="0">
+                <a:solidFill>
+                  <a:srgbClr val="1C2833"/>
+                </a:solidFill>
+                <a:latin typeface="Courier New" pitchFamily="34" charset="0"/>
+                <a:ea typeface="Courier New" pitchFamily="34" charset="-122"/>
+                <a:cs typeface="Courier New" pitchFamily="34" charset="-120"/>
+              </a:rPr>
+              <a:t>9 = 10 − 1</a:t>
+            </a:r>
+            <a:endParaRPr lang="en-US" sz="1100" dirty="0"/>
+          </a:p>
+        </p:txBody>
+      </p:sp>
+      <p:sp>
+        <p:nvSpPr>
+          <p:cNvPr id="8" name="Text 6"/>
+          <p:cNvSpPr/>
+          <p:nvPr/>
+        </p:nvSpPr>
+        <p:spPr>
+          <a:xfrm>
+            <a:off x="631627" y="1568500"/>
+            <a:ext cx="8086939" cy="174575"/>
+          </a:xfrm>
+          <a:prstGeom prst="rect">
+            <a:avLst/>
+          </a:prstGeom>
+          <a:noFill/>
+          <a:ln/>
+        </p:spPr>
+        <p:txBody>
+          <a:bodyPr wrap="square" lIns="0" tIns="0" rIns="0" bIns="0" rtlCol="0" anchor="t"/>
+          <a:lstStyle/>
+          <a:p>
+            <a:pPr algn="l" indent="0" marL="0">
+              <a:lnSpc>
+                <a:spcPts val="1375"/>
+              </a:lnSpc>
+              <a:buNone/>
+            </a:pPr>
+            <a:r>
+              <a:rPr lang="en-US" sz="1100" dirty="0">
+                <a:solidFill>
+                  <a:srgbClr val="1C2833"/>
+                </a:solidFill>
+                <a:latin typeface="Courier New" pitchFamily="34" charset="0"/>
+                <a:ea typeface="Courier New" pitchFamily="34" charset="-122"/>
+                <a:cs typeface="Courier New" pitchFamily="34" charset="-120"/>
+              </a:rPr>
+              <a:t>So 33 + 9 = 33 + 10 − 1 = 43 − 1 = 42</a:t>
+            </a:r>
+            <a:endParaRPr lang="en-US" sz="1100" dirty="0"/>
+          </a:p>
+        </p:txBody>
+      </p:sp>
+      <p:sp>
+        <p:nvSpPr>
+          <p:cNvPr id="9" name="Text 7"/>
+          <p:cNvSpPr/>
+          <p:nvPr/>
+        </p:nvSpPr>
+        <p:spPr>
+          <a:xfrm>
+            <a:off x="406301" y="1958876"/>
+            <a:ext cx="8498026" cy="213271"/>
+          </a:xfrm>
+          <a:prstGeom prst="rect">
+            <a:avLst/>
+          </a:prstGeom>
+          <a:noFill/>
+          <a:ln/>
+        </p:spPr>
+        <p:txBody>
+          <a:bodyPr wrap="square" lIns="0" tIns="0" rIns="0" bIns="0" rtlCol="0" anchor="t"/>
+          <a:lstStyle/>
+          <a:p>
             <a:pPr algn="l" indent="0" marL="0">
               <a:lnSpc>
                 <a:spcPts val="1680"/>
@@ -5079,7 +6862,7 @@
                 <a:ea typeface="Arial" pitchFamily="34" charset="-122"/>
                 <a:cs typeface="Arial" pitchFamily="34" charset="-120"/>
               </a:rPr>
-              <a:t>+ 9</a:t>
+              <a:t>Now do it in your head: </a:t>
             </a:r>
             <a:pPr algn="l" indent="0" marL="0">
               <a:lnSpc>
@@ -5094,7 +6877,7 @@
               <a:buNone/>
             </a:pPr>
             <a:r>
-              <a:rPr lang="en-US" sz="1200" dirty="0">
+              <a:rPr lang="en-US" sz="1200" b="1" dirty="0">
                 <a:solidFill>
                   <a:srgbClr val="1C2833"/>
                 </a:solidFill>
@@ -5102,7 +6885,30 @@
                 <a:ea typeface="Arial" pitchFamily="34" charset="-122"/>
                 <a:cs typeface="Arial" pitchFamily="34" charset="-120"/>
               </a:rPr>
-              <a:t> to any 2-digit number in under 1 second? (Should be most of the class.) – Preview Day 8: project work begins.</a:t>
+              <a:t>add 10, subtract 1</a:t>
+            </a:r>
+            <a:pPr algn="l" indent="0" marL="0">
+              <a:lnSpc>
+                <a:spcPts val="1680"/>
+              </a:lnSpc>
+              <a:spcBef>
+                <a:spcPts val="300"/>
+              </a:spcBef>
+              <a:spcAft>
+                <a:spcPts val="300"/>
+              </a:spcAft>
+              <a:buNone/>
+            </a:pPr>
+            <a:r>
+              <a:rPr lang="en-US" sz="1200" dirty="0">
+                <a:solidFill>
+                  <a:srgbClr val="1C2833"/>
+                </a:solidFill>
+                <a:latin typeface="Arial" pitchFamily="34" charset="0"/>
+                <a:ea typeface="Arial" pitchFamily="34" charset="-122"/>
+                <a:cs typeface="Arial" pitchFamily="34" charset="-120"/>
+              </a:rPr>
+              <a:t>. ~0.5 seconds.</a:t>
             </a:r>
             <a:endParaRPr lang="en-US" sz="1200" dirty="0"/>
           </a:p>
@@ -5110,7 +6916,7 @@
       </p:sp>
       <p:sp>
         <p:nvSpPr>
-          <p:cNvPr id="5" name="Text 3"/>
+          <p:cNvPr id="10" name="Text 8"/>
           <p:cNvSpPr/>
           <p:nvPr/>
         </p:nvSpPr>
@@ -5260,7 +7066,7 @@
                 <a:ea typeface="Georgia" pitchFamily="34" charset="-122"/>
                 <a:cs typeface="Georgia" pitchFamily="34" charset="-120"/>
               </a:rPr>
-              <a:t>Student-facing content</a:t>
+              <a:t>Core (15 min) — The "near-base" pattern (cont.)</a:t>
             </a:r>
             <a:endParaRPr lang="en-US" sz="1800" dirty="0"/>
           </a:p>
@@ -5274,8 +7080,54 @@
         </p:nvSpPr>
         <p:spPr>
           <a:xfrm>
-            <a:off x="406301" y="883593"/>
-            <a:ext cx="8331398" cy="1881187"/>
+            <a:off x="634901" y="883593"/>
+            <a:ext cx="8102798" cy="281880"/>
+          </a:xfrm>
+          <a:prstGeom prst="rect">
+            <a:avLst/>
+          </a:prstGeom>
+          <a:noFill/>
+          <a:ln/>
+        </p:spPr>
+        <p:txBody>
+          <a:bodyPr wrap="square" lIns="0" tIns="0" rIns="0" bIns="0" rtlCol="0" anchor="t"/>
+          <a:lstStyle/>
+          <a:p>
+            <a:pPr algn="l" marL="342900" indent="-342900">
+              <a:lnSpc>
+                <a:spcPts val="1620"/>
+              </a:lnSpc>
+              <a:spcAft>
+                <a:spcPts val="300"/>
+              </a:spcAft>
+              <a:buSzPct val="100000"/>
+              <a:buChar char="•"/>
+            </a:pPr>
+            <a:r>
+              <a:rPr lang="en-US" sz="1200" b="1" dirty="0">
+                <a:solidFill>
+                  <a:srgbClr val="1C2833"/>
+                </a:solidFill>
+                <a:latin typeface="Arial" pitchFamily="34" charset="0"/>
+                <a:ea typeface="Arial" pitchFamily="34" charset="-122"/>
+                <a:cs typeface="Arial" pitchFamily="34" charset="-120"/>
+              </a:rPr>
+              <a:t>The general pattern (write on board):</a:t>
+            </a:r>
+            <a:endParaRPr lang="en-US" sz="1200" dirty="0"/>
+          </a:p>
+        </p:txBody>
+      </p:sp>
+      <p:sp>
+        <p:nvSpPr>
+          <p:cNvPr id="5" name="Text 3"/>
+          <p:cNvSpPr/>
+          <p:nvPr/>
+        </p:nvSpPr>
+        <p:spPr>
+          <a:xfrm>
+            <a:off x="406301" y="1266974"/>
+            <a:ext cx="8331398" cy="1419225"/>
           </a:xfrm>
           <a:prstGeom prst="rect">
             <a:avLst/>
@@ -5298,14 +7150,14 @@
       </p:sp>
       <p:sp>
         <p:nvSpPr>
-          <p:cNvPr id="5" name="Shape 3"/>
-          <p:cNvSpPr/>
-          <p:nvPr/>
-        </p:nvSpPr>
-        <p:spPr>
-          <a:xfrm>
-            <a:off x="434876" y="883593"/>
-            <a:ext cx="0" cy="1881187"/>
+          <p:cNvPr id="6" name="Shape 4"/>
+          <p:cNvSpPr/>
+          <p:nvPr/>
+        </p:nvSpPr>
+        <p:spPr>
+          <a:xfrm>
+            <a:off x="434876" y="1266974"/>
+            <a:ext cx="0" cy="1419225"/>
           </a:xfrm>
           <a:prstGeom prst="line">
             <a:avLst/>
@@ -5321,13 +7173,13 @@
       </p:sp>
       <p:sp>
         <p:nvSpPr>
-          <p:cNvPr id="6" name="Text 4"/>
-          <p:cNvSpPr/>
-          <p:nvPr/>
-        </p:nvSpPr>
-        <p:spPr>
-          <a:xfrm>
-            <a:off x="692051" y="1074093"/>
+          <p:cNvPr id="7" name="Text 5"/>
+          <p:cNvSpPr/>
+          <p:nvPr/>
+        </p:nvSpPr>
+        <p:spPr>
+          <a:xfrm>
+            <a:off x="692051" y="1457474"/>
             <a:ext cx="7973389" cy="230981"/>
           </a:xfrm>
           <a:prstGeom prst="rect">
@@ -5353,7 +7205,7 @@
               <a:buNone/>
             </a:pPr>
             <a:r>
-              <a:rPr lang="en-US" sz="1300" b="1" i="1" dirty="0">
+              <a:rPr lang="en-US" sz="1300" i="1" dirty="0">
                 <a:solidFill>
                   <a:srgbClr val="1C2833"/>
                 </a:solidFill>
@@ -5361,7 +7213,7 @@
                 <a:ea typeface="Georgia" pitchFamily="34" charset="-122"/>
                 <a:cs typeface="Georgia" pitchFamily="34" charset="-120"/>
               </a:rPr>
-              <a:t>Add a number near a base (10, 20, 30, 100)</a:t>
+              <a:t>To add a number that ends in 9, 8, 7 (close to a multiple of 10):</a:t>
             </a:r>
             <a:endParaRPr lang="en-US" sz="1300" dirty="0"/>
           </a:p>
@@ -5369,13 +7221,13 @@
       </p:sp>
       <p:sp>
         <p:nvSpPr>
-          <p:cNvPr id="7" name="Text 5"/>
-          <p:cNvSpPr/>
-          <p:nvPr/>
-        </p:nvSpPr>
-        <p:spPr>
-          <a:xfrm>
-            <a:off x="692051" y="1343174"/>
+          <p:cNvPr id="8" name="Text 6"/>
+          <p:cNvSpPr/>
+          <p:nvPr/>
+        </p:nvSpPr>
+        <p:spPr>
+          <a:xfrm>
+            <a:off x="692051" y="1726555"/>
             <a:ext cx="7973389" cy="230981"/>
           </a:xfrm>
           <a:prstGeom prst="rect">
@@ -5409,7 +7261,7 @@
                 <a:ea typeface="Georgia" pitchFamily="34" charset="-122"/>
                 <a:cs typeface="Georgia" pitchFamily="34" charset="-120"/>
               </a:rPr>
-              <a:t>1. Round it UP to the base. 2. Add that. 3. Subtract the deficiency.</a:t>
+              <a:t>ROUND UP to the multiple of 10.</a:t>
             </a:r>
             <a:endParaRPr lang="en-US" sz="1300" dirty="0"/>
           </a:p>
@@ -5417,14 +7269,14 @@
       </p:sp>
       <p:sp>
         <p:nvSpPr>
-          <p:cNvPr id="8" name="Text 6"/>
-          <p:cNvSpPr/>
-          <p:nvPr/>
-        </p:nvSpPr>
-        <p:spPr>
-          <a:xfrm>
-            <a:off x="692051" y="1612255"/>
-            <a:ext cx="7973389" cy="461963"/>
+          <p:cNvPr id="9" name="Text 7"/>
+          <p:cNvSpPr/>
+          <p:nvPr/>
+        </p:nvSpPr>
+        <p:spPr>
+          <a:xfrm>
+            <a:off x="692051" y="1995636"/>
+            <a:ext cx="7973389" cy="230981"/>
           </a:xfrm>
           <a:prstGeom prst="rect">
             <a:avLst/>
@@ -5449,7 +7301,7 @@
               <a:buNone/>
             </a:pPr>
             <a:r>
-              <a:rPr lang="en-US" sz="1300" b="1" i="1" dirty="0">
+              <a:rPr lang="en-US" sz="1300" i="1" dirty="0">
                 <a:solidFill>
                   <a:srgbClr val="1C2833"/>
                 </a:solidFill>
@@ -5457,8 +7309,33 @@
                 <a:ea typeface="Georgia" pitchFamily="34" charset="-122"/>
                 <a:cs typeface="Georgia" pitchFamily="34" charset="-120"/>
               </a:rPr>
-              <a:t>Examples:</a:t>
-            </a:r>
+              <a:t>ADD that.</a:t>
+            </a:r>
+            <a:endParaRPr lang="en-US" sz="1300" dirty="0"/>
+          </a:p>
+        </p:txBody>
+      </p:sp>
+      <p:sp>
+        <p:nvSpPr>
+          <p:cNvPr id="10" name="Text 8"/>
+          <p:cNvSpPr/>
+          <p:nvPr/>
+        </p:nvSpPr>
+        <p:spPr>
+          <a:xfrm>
+            <a:off x="692051" y="2264718"/>
+            <a:ext cx="7973389" cy="230981"/>
+          </a:xfrm>
+          <a:prstGeom prst="rect">
+            <a:avLst/>
+          </a:prstGeom>
+          <a:noFill/>
+          <a:ln/>
+        </p:spPr>
+        <p:txBody>
+          <a:bodyPr wrap="square" lIns="0" tIns="0" rIns="0" bIns="0" rtlCol="0" anchor="t"/>
+          <a:lstStyle/>
+          <a:p>
             <a:pPr algn="l" indent="0" marL="0">
               <a:lnSpc>
                 <a:spcPts val="1820"/>
@@ -5472,7 +7349,7 @@
               <a:buNone/>
             </a:pPr>
             <a:r>
-              <a:rPr lang="en-US" sz="1300" dirty="0">
+              <a:rPr lang="en-US" sz="1300" i="1" dirty="0">
                 <a:solidFill>
                   <a:srgbClr val="1C2833"/>
                 </a:solidFill>
@@ -5480,7 +7357,7 @@
                 <a:ea typeface="Georgia" pitchFamily="34" charset="-122"/>
                 <a:cs typeface="Georgia" pitchFamily="34" charset="-120"/>
               </a:rPr>
-              <a:t> - 33 + 9 = 33 + 10 − 1 = 42 - 47 + 19 = 47 + 20 − 1 = 66 - 55 + 48 = 55 + 50 − 2 = 103 - 234 + 99 = 234 + 100 − 1 = 333</a:t>
+              <a:t>SUBTRACT the deficiency.</a:t>
             </a:r>
             <a:endParaRPr lang="en-US" sz="1300" dirty="0"/>
           </a:p>
@@ -5488,101 +7365,7 @@
       </p:sp>
       <p:sp>
         <p:nvSpPr>
-          <p:cNvPr id="9" name="Text 7"/>
-          <p:cNvSpPr/>
-          <p:nvPr/>
-        </p:nvSpPr>
-        <p:spPr>
-          <a:xfrm>
-            <a:off x="692051" y="2112318"/>
-            <a:ext cx="7973389" cy="461963"/>
-          </a:xfrm>
-          <a:prstGeom prst="rect">
-            <a:avLst/>
-          </a:prstGeom>
-          <a:noFill/>
-          <a:ln/>
-        </p:spPr>
-        <p:txBody>
-          <a:bodyPr wrap="square" lIns="0" tIns="0" rIns="0" bIns="0" rtlCol="0" anchor="t"/>
-          <a:lstStyle/>
-          <a:p>
-            <a:pPr algn="l" indent="0" marL="0">
-              <a:lnSpc>
-                <a:spcPts val="1820"/>
-              </a:lnSpc>
-              <a:spcBef>
-                <a:spcPts val="300"/>
-              </a:spcBef>
-              <a:spcAft>
-                <a:spcPts val="300"/>
-              </a:spcAft>
-              <a:buNone/>
-            </a:pPr>
-            <a:r>
-              <a:rPr lang="en-US" sz="1300" dirty="0">
-                <a:solidFill>
-                  <a:srgbClr val="1C2833"/>
-                </a:solidFill>
-                <a:latin typeface="Georgia" pitchFamily="34" charset="0"/>
-                <a:ea typeface="Georgia" pitchFamily="34" charset="-122"/>
-                <a:cs typeface="Georgia" pitchFamily="34" charset="-120"/>
-              </a:rPr>
-              <a:t>This pattern is named in Tirthaji's 7th sūtra: </a:t>
-            </a:r>
-            <a:pPr algn="l" indent="0" marL="0">
-              <a:lnSpc>
-                <a:spcPts val="1820"/>
-              </a:lnSpc>
-              <a:spcBef>
-                <a:spcPts val="300"/>
-              </a:spcBef>
-              <a:spcAft>
-                <a:spcPts val="300"/>
-              </a:spcAft>
-              <a:buNone/>
-            </a:pPr>
-            <a:r>
-              <a:rPr lang="en-US" sz="1300" b="1" i="1" dirty="0">
-                <a:solidFill>
-                  <a:srgbClr val="1C2833"/>
-                </a:solidFill>
-                <a:latin typeface="Georgia" pitchFamily="34" charset="0"/>
-                <a:ea typeface="Georgia" pitchFamily="34" charset="-122"/>
-                <a:cs typeface="Georgia" pitchFamily="34" charset="-120"/>
-              </a:rPr>
-              <a:t>Sankalana Vyavakalanābhyām</a:t>
-            </a:r>
-            <a:pPr algn="l" indent="0" marL="0">
-              <a:lnSpc>
-                <a:spcPts val="1820"/>
-              </a:lnSpc>
-              <a:spcBef>
-                <a:spcPts val="300"/>
-              </a:spcBef>
-              <a:spcAft>
-                <a:spcPts val="300"/>
-              </a:spcAft>
-              <a:buNone/>
-            </a:pPr>
-            <a:r>
-              <a:rPr lang="en-US" sz="1300" dirty="0">
-                <a:solidFill>
-                  <a:srgbClr val="1C2833"/>
-                </a:solidFill>
-                <a:latin typeface="Georgia" pitchFamily="34" charset="0"/>
-                <a:ea typeface="Georgia" pitchFamily="34" charset="-122"/>
-                <a:cs typeface="Georgia" pitchFamily="34" charset="-120"/>
-              </a:rPr>
-              <a:t> — "by addition and by subtraction."</a:t>
-            </a:r>
-            <a:endParaRPr lang="en-US" sz="1300" dirty="0"/>
-          </a:p>
-        </p:txBody>
-      </p:sp>
-      <p:sp>
-        <p:nvSpPr>
-          <p:cNvPr id="10" name="Text 8"/>
+          <p:cNvPr id="11" name="Text 9"/>
           <p:cNvSpPr/>
           <p:nvPr/>
         </p:nvSpPr>
@@ -5732,7 +7515,7 @@
                 <a:ea typeface="Georgia" pitchFamily="34" charset="-122"/>
                 <a:cs typeface="Georgia" pitchFamily="34" charset="-120"/>
               </a:rPr>
-              <a:t>Homework</a:t>
+              <a:t>Core (15 min) — The "near-base" pattern (cont.)</a:t>
             </a:r>
             <a:endParaRPr lang="en-US" sz="1800" dirty="0"/>
           </a:p>
@@ -5746,8 +7529,8 @@
         </p:nvSpPr>
         <p:spPr>
           <a:xfrm>
-            <a:off x="406301" y="870942"/>
-            <a:ext cx="8498026" cy="426541"/>
+            <a:off x="634901" y="883593"/>
+            <a:ext cx="8102798" cy="281880"/>
           </a:xfrm>
           <a:prstGeom prst="rect">
             <a:avLst/>
@@ -5759,17 +7542,15 @@
           <a:bodyPr wrap="square" lIns="0" tIns="0" rIns="0" bIns="0" rtlCol="0" anchor="t"/>
           <a:lstStyle/>
           <a:p>
-            <a:pPr algn="l" indent="0" marL="0">
-              <a:lnSpc>
-                <a:spcPts val="1680"/>
-              </a:lnSpc>
-              <a:spcBef>
-                <a:spcPts val="300"/>
-              </a:spcBef>
-              <a:spcAft>
-                <a:spcPts val="300"/>
-              </a:spcAft>
-              <a:buNone/>
+            <a:pPr algn="l" marL="342900" indent="-342900">
+              <a:lnSpc>
+                <a:spcPts val="1620"/>
+              </a:lnSpc>
+              <a:spcAft>
+                <a:spcPts val="300"/>
+              </a:spcAft>
+              <a:buSzPct val="100000"/>
+              <a:buChar char="•"/>
             </a:pPr>
             <a:r>
               <a:rPr lang="en-US" sz="1200" dirty="0">
@@ -5780,7 +7561,7 @@
                 <a:ea typeface="Arial" pitchFamily="34" charset="-122"/>
                 <a:cs typeface="Arial" pitchFamily="34" charset="-120"/>
               </a:rPr>
-              <a:t>– 20 mental additions. Do them in under 60 seconds. List on the back of today's worksheet. – Bring all project materials tomorrow.</a:t>
+              <a:t>Worked examples (class chorus):</a:t>
             </a:r>
             <a:endParaRPr lang="en-US" sz="1200" dirty="0"/>
           </a:p>
@@ -5789,6 +7570,148 @@
       <p:sp>
         <p:nvSpPr>
           <p:cNvPr id="5" name="Text 3"/>
+          <p:cNvSpPr/>
+          <p:nvPr/>
+        </p:nvSpPr>
+        <p:spPr>
+          <a:xfrm>
+            <a:off x="634901" y="1266974"/>
+            <a:ext cx="8102798" cy="1257002"/>
+          </a:xfrm>
+          <a:prstGeom prst="rect">
+            <a:avLst/>
+          </a:prstGeom>
+          <a:noFill/>
+          <a:ln/>
+        </p:spPr>
+        <p:txBody>
+          <a:bodyPr wrap="square" lIns="0" tIns="0" rIns="0" bIns="0" rtlCol="0" anchor="t"/>
+          <a:lstStyle/>
+          <a:p>
+            <a:pPr algn="l" marL="342900" indent="-342900">
+              <a:lnSpc>
+                <a:spcPts val="1620"/>
+              </a:lnSpc>
+              <a:spcAft>
+                <a:spcPts val="300"/>
+              </a:spcAft>
+              <a:buSzPct val="100000"/>
+              <a:buChar char="•"/>
+            </a:pPr>
+            <a:r>
+              <a:rPr lang="en-US" sz="1200" dirty="0">
+                <a:solidFill>
+                  <a:srgbClr val="1C2833"/>
+                </a:solidFill>
+                <a:latin typeface="Arial" pitchFamily="34" charset="0"/>
+                <a:ea typeface="Arial" pitchFamily="34" charset="-122"/>
+                <a:cs typeface="Arial" pitchFamily="34" charset="-120"/>
+              </a:rPr>
+              <a:t>47 + 9 = 47 + 10 − 1 = 56</a:t>
+            </a:r>
+            <a:endParaRPr lang="en-US" sz="1200" dirty="0"/>
+          </a:p>
+          <a:p>
+            <a:pPr algn="l" marL="342900" indent="-342900">
+              <a:lnSpc>
+                <a:spcPts val="1620"/>
+              </a:lnSpc>
+              <a:spcAft>
+                <a:spcPts val="300"/>
+              </a:spcAft>
+              <a:buSzPct val="100000"/>
+              <a:buChar char="•"/>
+            </a:pPr>
+            <a:r>
+              <a:rPr lang="en-US" sz="1200" dirty="0">
+                <a:solidFill>
+                  <a:srgbClr val="1C2833"/>
+                </a:solidFill>
+                <a:latin typeface="Arial" pitchFamily="34" charset="0"/>
+                <a:ea typeface="Arial" pitchFamily="34" charset="-122"/>
+                <a:cs typeface="Arial" pitchFamily="34" charset="-120"/>
+              </a:rPr>
+              <a:t>28 + 19 = 28 + 20 − 1 = 47</a:t>
+            </a:r>
+            <a:endParaRPr lang="en-US" sz="1200" dirty="0"/>
+          </a:p>
+          <a:p>
+            <a:pPr algn="l" marL="342900" indent="-342900">
+              <a:lnSpc>
+                <a:spcPts val="1620"/>
+              </a:lnSpc>
+              <a:spcAft>
+                <a:spcPts val="300"/>
+              </a:spcAft>
+              <a:buSzPct val="100000"/>
+              <a:buChar char="•"/>
+            </a:pPr>
+            <a:r>
+              <a:rPr lang="en-US" sz="1200" dirty="0">
+                <a:solidFill>
+                  <a:srgbClr val="1C2833"/>
+                </a:solidFill>
+                <a:latin typeface="Arial" pitchFamily="34" charset="0"/>
+                <a:ea typeface="Arial" pitchFamily="34" charset="-122"/>
+                <a:cs typeface="Arial" pitchFamily="34" charset="-120"/>
+              </a:rPr>
+              <a:t>64 + 29 = 64 + 30 − 1 = 93</a:t>
+            </a:r>
+            <a:endParaRPr lang="en-US" sz="1200" dirty="0"/>
+          </a:p>
+          <a:p>
+            <a:pPr algn="l" marL="342900" indent="-342900">
+              <a:lnSpc>
+                <a:spcPts val="1620"/>
+              </a:lnSpc>
+              <a:spcAft>
+                <a:spcPts val="300"/>
+              </a:spcAft>
+              <a:buSzPct val="100000"/>
+              <a:buChar char="•"/>
+            </a:pPr>
+            <a:r>
+              <a:rPr lang="en-US" sz="1200" dirty="0">
+                <a:solidFill>
+                  <a:srgbClr val="1C2833"/>
+                </a:solidFill>
+                <a:latin typeface="Arial" pitchFamily="34" charset="0"/>
+                <a:ea typeface="Arial" pitchFamily="34" charset="-122"/>
+                <a:cs typeface="Arial" pitchFamily="34" charset="-120"/>
+              </a:rPr>
+              <a:t>55 + 48 = 55 + 50 − 2 = 103</a:t>
+            </a:r>
+            <a:endParaRPr lang="en-US" sz="1200" dirty="0"/>
+          </a:p>
+          <a:p>
+            <a:pPr algn="l" marL="342900" indent="-342900">
+              <a:lnSpc>
+                <a:spcPts val="1620"/>
+              </a:lnSpc>
+              <a:spcAft>
+                <a:spcPts val="300"/>
+              </a:spcAft>
+              <a:buSzPct val="100000"/>
+              <a:buChar char="•"/>
+            </a:pPr>
+            <a:r>
+              <a:rPr lang="en-US" sz="1200" dirty="0">
+                <a:solidFill>
+                  <a:srgbClr val="1C2833"/>
+                </a:solidFill>
+                <a:latin typeface="Arial" pitchFamily="34" charset="0"/>
+                <a:ea typeface="Arial" pitchFamily="34" charset="-122"/>
+                <a:cs typeface="Arial" pitchFamily="34" charset="-120"/>
+              </a:rPr>
+              <a:t>36 + 38 = 36 + 40 − 2 = 74</a:t>
+            </a:r>
+            <a:endParaRPr lang="en-US" sz="1200" dirty="0"/>
+          </a:p>
+        </p:txBody>
+      </p:sp>
+      <p:sp>
+        <p:nvSpPr>
+          <p:cNvPr id="6" name="Text 4"/>
           <p:cNvSpPr/>
           <p:nvPr/>
         </p:nvSpPr>
